--- a/presentations/13-kids-move-and-catch/13-kids-move-and-catch-lab.pptx
+++ b/presentations/13-kids-move-and-catch/13-kids-move-and-catch-lab.pptx
@@ -35,9 +35,10 @@
     <p:sldId id="283" r:id="rId29"/>
     <p:sldId id="284" r:id="rId30"/>
     <p:sldId id="285" r:id="rId31"/>
+    <p:sldId id="286" r:id="rId32"/>
   </p:sldIdLst>
   <p:notesMasterIdLst>
-    <p:notesMasterId r:id="rId32"/>
+    <p:notesMasterId r:id="rId33"/>
   </p:notesMasterIdLst>
   <p:sldSz cx="12192000" cy="6858000"/>
   <p:notesSz cx="6858000" cy="12192000"/>
@@ -136,7 +137,7 @@
   <p:extLst>
     <p:ext uri="{521415D9-36F7-43E2-AB2F-B90AF26B5E84}">
       <p14:sectionLst xmlns:p14="http://schemas.microsoft.com/office/powerpoint/2010/main">
-        <p14:section name="Opening" id="{191b2ea0-489b-bf47-9fe9-67a337d63ebc}">
+        <p14:section name="Opening" id="{4980df97-fa9b-859a-7390-3e5dd2ae59d5}">
           <p14:sldIdLst>
             <p14:sldId id="256"/>
             <p14:sldId id="257"/>
@@ -144,7 +145,7 @@
             <p14:sldId id="259"/>
           </p14:sldIdLst>
         </p14:section>
-        <p14:section name="Mission 2" id="{d8fcad6a-3b38-de14-2cad-3a5f72e488ee}">
+        <p14:section name="Mission 2" id="{649a1454-9e84-b6e8-46b8-eb04e602bbab}">
           <p14:sldIdLst>
             <p14:sldId id="260"/>
             <p14:sldId id="261"/>
@@ -157,7 +158,7 @@
             <p14:sldId id="268"/>
           </p14:sldIdLst>
         </p14:section>
-        <p14:section name="Mission 3" id="{9cb611cc-d19c-58f4-172b-64b2157d3672}">
+        <p14:section name="Mission 3" id="{329d82f9-a533-3e32-5d29-efe4afe6dc28}">
           <p14:sldIdLst>
             <p14:sldId id="269"/>
             <p14:sldId id="270"/>
@@ -172,18 +173,19 @@
             <p14:sldId id="279"/>
             <p14:sldId id="280"/>
             <p14:sldId id="281"/>
+            <p14:sldId id="282"/>
           </p14:sldIdLst>
         </p14:section>
-        <p14:section name="Make it yours" id="{93444b5e-7a38-d146-ca4b-2d1706d2a54f}">
+        <p14:section name="Make it yours" id="{1a838a45-652e-fe3e-f907-b472c49f74b1}">
           <p14:sldIdLst>
-            <p14:sldId id="282"/>
             <p14:sldId id="283"/>
             <p14:sldId id="284"/>
+            <p14:sldId id="285"/>
           </p14:sldIdLst>
         </p14:section>
-        <p14:section name="Closing" id="{70e909bf-b834-a193-ea9c-bbcb448f24af}">
+        <p14:section name="Closing" id="{36506f8a-730b-07d9-48b8-5229ac2fcf01}">
           <p14:sldIdLst>
-            <p14:sldId id="285"/>
+            <p14:sldId id="286"/>
           </p14:sldIdLst>
         </p14:section>
       </p14:sectionLst>
@@ -2638,6 +2640,94 @@
             <a:fld id="{F7021451-1387-4CA6-816F-3879F97B5CBC}" type="slidenum">
               <a:rPr lang="en-US"/>
               <a:t>30</a:t>
+            </a:fld>
+            <a:endParaRPr lang="en-US"/>
+          </a:p>
+        </p:txBody>
+      </p:sp>
+    </p:spTree>
+    <p:extLst>
+      <p:ext uri="{BB962C8B-B14F-4D97-AF65-F5344CB8AC3E}">
+        <p14:creationId xmlns:p14="http://schemas.microsoft.com/office/powerpoint/2010/main" val="1024086991"/>
+      </p:ext>
+    </p:extLst>
+  </p:cSld>
+  <p:clrMapOvr>
+    <a:masterClrMapping/>
+  </p:clrMapOvr>
+</p:notes>
+</file>
+
+<file path=ppt/notesSlides/notesSlide31.xml><?xml version="1.0" encoding="utf-8"?>
+<p:notes xmlns:a="http://schemas.openxmlformats.org/drawingml/2006/main" xmlns:r="http://schemas.openxmlformats.org/officeDocument/2006/relationships" xmlns:p="http://schemas.openxmlformats.org/presentationml/2006/main">
+  <p:cSld>
+    <p:spTree>
+      <p:nvGrpSpPr>
+        <p:cNvPr id="1" name=""/>
+        <p:cNvGrpSpPr/>
+        <p:nvPr/>
+      </p:nvGrpSpPr>
+      <p:grpSpPr>
+        <a:xfrm>
+          <a:off x="0" y="0"/>
+          <a:ext cx="0" cy="0"/>
+          <a:chOff x="0" y="0"/>
+          <a:chExt cx="0" cy="0"/>
+        </a:xfrm>
+      </p:grpSpPr>
+      <p:sp>
+        <p:nvSpPr>
+          <p:cNvPr id="2" name="Slide Image Placeholder 1"/>
+          <p:cNvSpPr>
+            <a:spLocks noGrp="1" noRot="1" noChangeAspect="1"/>
+          </p:cNvSpPr>
+          <p:nvPr>
+            <p:ph type="sldImg"/>
+          </p:nvPr>
+        </p:nvSpPr>
+        <p:spPr/>
+      </p:sp>
+      <p:sp>
+        <p:nvSpPr>
+          <p:cNvPr id="3" name="Notes Placeholder 2"/>
+          <p:cNvSpPr>
+            <a:spLocks noGrp="1"/>
+          </p:cNvSpPr>
+          <p:nvPr>
+            <p:ph type="body" idx="1"/>
+          </p:nvPr>
+        </p:nvSpPr>
+        <p:spPr/>
+        <p:txBody>
+          <a:bodyPr/>
+          <a:lstStyle/>
+          <a:p>
+            <a:r>
+              <a:rPr lang="en-US" dirty="0"/>
+              <a:t/>
+            </a:r>
+            <a:endParaRPr lang="en-US" dirty="0"/>
+          </a:p>
+        </p:txBody>
+      </p:sp>
+      <p:sp>
+        <p:nvSpPr>
+          <p:cNvPr id="4" name="Slide Number Placeholder 3"/>
+          <p:cNvSpPr>
+            <a:spLocks noGrp="1"/>
+          </p:cNvSpPr>
+          <p:nvPr>
+            <p:ph type="sldNum" sz="quarter" idx="10"/>
+          </p:nvPr>
+        </p:nvSpPr>
+        <p:spPr/>
+        <p:txBody>
+          <a:bodyPr/>
+          <a:lstStyle/>
+          <a:p>
+            <a:fld id="{F7021451-1387-4CA6-816F-3879F97B5CBC}" type="slidenum">
+              <a:rPr lang="en-US"/>
+              <a:t>31</a:t>
             </a:fld>
             <a:endParaRPr lang="en-US"/>
           </a:p>
@@ -4604,12 +4694,12 @@
         </p:nvSpPr>
         <p:spPr>
           <a:xfrm>
-            <a:off x="8092440" y="2834640"/>
-            <a:ext cx="3550615" cy="3383280"/>
+            <a:off x="8092440" y="2788920"/>
+            <a:ext cx="3550615" cy="3429000"/>
           </a:xfrm>
           <a:prstGeom prst="roundRect">
             <a:avLst>
-              <a:gd name="adj" fmla="val 2162"/>
+              <a:gd name="adj" fmla="val 2133"/>
             </a:avLst>
           </a:prstGeom>
           <a:solidFill>
@@ -4631,8 +4721,8 @@
         </p:nvSpPr>
         <p:spPr>
           <a:xfrm>
-            <a:off x="8321040" y="2971800"/>
-            <a:ext cx="3093415" cy="365760"/>
+            <a:off x="8321040" y="2880360"/>
+            <a:ext cx="3093415" cy="310896"/>
           </a:xfrm>
           <a:prstGeom prst="rect">
             <a:avLst/>
@@ -4648,7 +4738,7 @@
               <a:buNone/>
             </a:pPr>
             <a:r>
-              <a:rPr lang="en-US" sz="1500" b="1" dirty="0">
+              <a:rPr lang="en-US" sz="1400" b="1" dirty="0">
                 <a:solidFill>
                   <a:srgbClr val="2F7D4F"/>
                 </a:solidFill>
@@ -4658,7 +4748,7 @@
               </a:rPr>
               <a:t>You should see</a:t>
             </a:r>
-            <a:endParaRPr lang="en-US" sz="1500" dirty="0"/>
+            <a:endParaRPr lang="en-US" sz="1400" dirty="0"/>
           </a:p>
         </p:txBody>
       </p:sp>
@@ -4670,8 +4760,8 @@
         </p:nvSpPr>
         <p:spPr>
           <a:xfrm>
-            <a:off x="8321040" y="3429000"/>
-            <a:ext cx="3093415" cy="2606040"/>
+            <a:off x="8321040" y="3246120"/>
+            <a:ext cx="3093415" cy="2862072"/>
           </a:xfrm>
           <a:prstGeom prst="rect">
             <a:avLst/>
@@ -5765,12 +5855,12 @@
         </p:nvSpPr>
         <p:spPr>
           <a:xfrm>
-            <a:off x="8092440" y="2834640"/>
-            <a:ext cx="3550615" cy="3383280"/>
+            <a:off x="8092440" y="2788920"/>
+            <a:ext cx="3550615" cy="3429000"/>
           </a:xfrm>
           <a:prstGeom prst="roundRect">
             <a:avLst>
-              <a:gd name="adj" fmla="val 2162"/>
+              <a:gd name="adj" fmla="val 2133"/>
             </a:avLst>
           </a:prstGeom>
           <a:solidFill>
@@ -5792,8 +5882,8 @@
         </p:nvSpPr>
         <p:spPr>
           <a:xfrm>
-            <a:off x="8321040" y="2971800"/>
-            <a:ext cx="3093415" cy="365760"/>
+            <a:off x="8321040" y="2880360"/>
+            <a:ext cx="3093415" cy="310896"/>
           </a:xfrm>
           <a:prstGeom prst="rect">
             <a:avLst/>
@@ -5809,7 +5899,7 @@
               <a:buNone/>
             </a:pPr>
             <a:r>
-              <a:rPr lang="en-US" sz="1500" b="1" dirty="0">
+              <a:rPr lang="en-US" sz="1400" b="1" dirty="0">
                 <a:solidFill>
                   <a:srgbClr val="2F7D4F"/>
                 </a:solidFill>
@@ -5819,7 +5909,7 @@
               </a:rPr>
               <a:t>You should see</a:t>
             </a:r>
-            <a:endParaRPr lang="en-US" sz="1500" dirty="0"/>
+            <a:endParaRPr lang="en-US" sz="1400" dirty="0"/>
           </a:p>
         </p:txBody>
       </p:sp>
@@ -5831,8 +5921,8 @@
         </p:nvSpPr>
         <p:spPr>
           <a:xfrm>
-            <a:off x="8321040" y="3429000"/>
-            <a:ext cx="3093415" cy="2606040"/>
+            <a:off x="8321040" y="3246120"/>
+            <a:ext cx="3093415" cy="2862072"/>
           </a:xfrm>
           <a:prstGeom prst="rect">
             <a:avLst/>
@@ -6433,12 +6523,12 @@
         </p:nvSpPr>
         <p:spPr>
           <a:xfrm>
-            <a:off x="8092440" y="2834640"/>
-            <a:ext cx="3550615" cy="3383280"/>
+            <a:off x="8092440" y="2788920"/>
+            <a:ext cx="3550615" cy="3429000"/>
           </a:xfrm>
           <a:prstGeom prst="roundRect">
             <a:avLst>
-              <a:gd name="adj" fmla="val 2162"/>
+              <a:gd name="adj" fmla="val 2133"/>
             </a:avLst>
           </a:prstGeom>
           <a:solidFill>
@@ -6460,8 +6550,8 @@
         </p:nvSpPr>
         <p:spPr>
           <a:xfrm>
-            <a:off x="8321040" y="2971800"/>
-            <a:ext cx="3093415" cy="365760"/>
+            <a:off x="8321040" y="2880360"/>
+            <a:ext cx="3093415" cy="310896"/>
           </a:xfrm>
           <a:prstGeom prst="rect">
             <a:avLst/>
@@ -6477,7 +6567,7 @@
               <a:buNone/>
             </a:pPr>
             <a:r>
-              <a:rPr lang="en-US" sz="1500" b="1" dirty="0">
+              <a:rPr lang="en-US" sz="1400" b="1" dirty="0">
                 <a:solidFill>
                   <a:srgbClr val="2F7D4F"/>
                 </a:solidFill>
@@ -6487,7 +6577,7 @@
               </a:rPr>
               <a:t>You should see</a:t>
             </a:r>
-            <a:endParaRPr lang="en-US" sz="1500" dirty="0"/>
+            <a:endParaRPr lang="en-US" sz="1400" dirty="0"/>
           </a:p>
         </p:txBody>
       </p:sp>
@@ -6499,8 +6589,8 @@
         </p:nvSpPr>
         <p:spPr>
           <a:xfrm>
-            <a:off x="8321040" y="3429000"/>
-            <a:ext cx="3093415" cy="2606040"/>
+            <a:off x="8321040" y="3246120"/>
+            <a:ext cx="3093415" cy="2862072"/>
           </a:xfrm>
           <a:prstGeom prst="rect">
             <a:avLst/>
@@ -7291,12 +7381,12 @@
         </p:nvSpPr>
         <p:spPr>
           <a:xfrm>
-            <a:off x="8092440" y="2834640"/>
-            <a:ext cx="3550615" cy="3383280"/>
+            <a:off x="8092440" y="2788920"/>
+            <a:ext cx="3550615" cy="3429000"/>
           </a:xfrm>
           <a:prstGeom prst="roundRect">
             <a:avLst>
-              <a:gd name="adj" fmla="val 2162"/>
+              <a:gd name="adj" fmla="val 2133"/>
             </a:avLst>
           </a:prstGeom>
           <a:solidFill>
@@ -7318,8 +7408,8 @@
         </p:nvSpPr>
         <p:spPr>
           <a:xfrm>
-            <a:off x="8321040" y="2971800"/>
-            <a:ext cx="3093415" cy="365760"/>
+            <a:off x="8321040" y="2880360"/>
+            <a:ext cx="3093415" cy="310896"/>
           </a:xfrm>
           <a:prstGeom prst="rect">
             <a:avLst/>
@@ -7335,7 +7425,7 @@
               <a:buNone/>
             </a:pPr>
             <a:r>
-              <a:rPr lang="en-US" sz="1500" b="1" dirty="0">
+              <a:rPr lang="en-US" sz="1400" b="1" dirty="0">
                 <a:solidFill>
                   <a:srgbClr val="2F7D4F"/>
                 </a:solidFill>
@@ -7345,7 +7435,7 @@
               </a:rPr>
               <a:t>You should see</a:t>
             </a:r>
-            <a:endParaRPr lang="en-US" sz="1500" dirty="0"/>
+            <a:endParaRPr lang="en-US" sz="1400" dirty="0"/>
           </a:p>
         </p:txBody>
       </p:sp>
@@ -7357,8 +7447,8 @@
         </p:nvSpPr>
         <p:spPr>
           <a:xfrm>
-            <a:off x="8321040" y="3429000"/>
-            <a:ext cx="3093415" cy="2606040"/>
+            <a:off x="8321040" y="3246120"/>
+            <a:ext cx="3093415" cy="2862072"/>
           </a:xfrm>
           <a:prstGeom prst="rect">
             <a:avLst/>
@@ -9274,12 +9364,12 @@
         </p:nvSpPr>
         <p:spPr>
           <a:xfrm>
-            <a:off x="8092440" y="2834640"/>
-            <a:ext cx="3550615" cy="3383280"/>
+            <a:off x="8092440" y="2788920"/>
+            <a:ext cx="3550615" cy="3429000"/>
           </a:xfrm>
           <a:prstGeom prst="roundRect">
             <a:avLst>
-              <a:gd name="adj" fmla="val 2162"/>
+              <a:gd name="adj" fmla="val 2133"/>
             </a:avLst>
           </a:prstGeom>
           <a:solidFill>
@@ -9301,8 +9391,8 @@
         </p:nvSpPr>
         <p:spPr>
           <a:xfrm>
-            <a:off x="8321040" y="2971800"/>
-            <a:ext cx="3093415" cy="365760"/>
+            <a:off x="8321040" y="2880360"/>
+            <a:ext cx="3093415" cy="310896"/>
           </a:xfrm>
           <a:prstGeom prst="rect">
             <a:avLst/>
@@ -9318,7 +9408,7 @@
               <a:buNone/>
             </a:pPr>
             <a:r>
-              <a:rPr lang="en-US" sz="1500" b="1" dirty="0">
+              <a:rPr lang="en-US" sz="1400" b="1" dirty="0">
                 <a:solidFill>
                   <a:srgbClr val="2F7D4F"/>
                 </a:solidFill>
@@ -9328,7 +9418,7 @@
               </a:rPr>
               <a:t>You should see</a:t>
             </a:r>
-            <a:endParaRPr lang="en-US" sz="1500" dirty="0"/>
+            <a:endParaRPr lang="en-US" sz="1400" dirty="0"/>
           </a:p>
         </p:txBody>
       </p:sp>
@@ -9340,8 +9430,8 @@
         </p:nvSpPr>
         <p:spPr>
           <a:xfrm>
-            <a:off x="8321040" y="3429000"/>
-            <a:ext cx="3093415" cy="2606040"/>
+            <a:off x="8321040" y="3246120"/>
+            <a:ext cx="3093415" cy="2862072"/>
           </a:xfrm>
           <a:prstGeom prst="rect">
             <a:avLst/>
@@ -11828,12 +11918,12 @@
         </p:nvSpPr>
         <p:spPr>
           <a:xfrm>
-            <a:off x="8092440" y="2834640"/>
-            <a:ext cx="3550615" cy="3383280"/>
+            <a:off x="8092440" y="2788920"/>
+            <a:ext cx="3550615" cy="3429000"/>
           </a:xfrm>
           <a:prstGeom prst="roundRect">
             <a:avLst>
-              <a:gd name="adj" fmla="val 2162"/>
+              <a:gd name="adj" fmla="val 2133"/>
             </a:avLst>
           </a:prstGeom>
           <a:solidFill>
@@ -11855,8 +11945,8 @@
         </p:nvSpPr>
         <p:spPr>
           <a:xfrm>
-            <a:off x="8321040" y="2971800"/>
-            <a:ext cx="3093415" cy="365760"/>
+            <a:off x="8321040" y="2880360"/>
+            <a:ext cx="3093415" cy="310896"/>
           </a:xfrm>
           <a:prstGeom prst="rect">
             <a:avLst/>
@@ -11872,7 +11962,7 @@
               <a:buNone/>
             </a:pPr>
             <a:r>
-              <a:rPr lang="en-US" sz="1500" b="1" dirty="0">
+              <a:rPr lang="en-US" sz="1400" b="1" dirty="0">
                 <a:solidFill>
                   <a:srgbClr val="2F7D4F"/>
                 </a:solidFill>
@@ -11882,7 +11972,7 @@
               </a:rPr>
               <a:t>You should see</a:t>
             </a:r>
-            <a:endParaRPr lang="en-US" sz="1500" dirty="0"/>
+            <a:endParaRPr lang="en-US" sz="1400" dirty="0"/>
           </a:p>
         </p:txBody>
       </p:sp>
@@ -11894,8 +11984,8 @@
         </p:nvSpPr>
         <p:spPr>
           <a:xfrm>
-            <a:off x="8321040" y="3429000"/>
-            <a:ext cx="3093415" cy="2606040"/>
+            <a:off x="8321040" y="3246120"/>
+            <a:ext cx="3093415" cy="2862072"/>
           </a:xfrm>
           <a:prstGeom prst="rect">
             <a:avLst/>
@@ -13169,12 +13259,12 @@
         </p:nvSpPr>
         <p:spPr>
           <a:xfrm>
-            <a:off x="8092440" y="2834640"/>
-            <a:ext cx="3550615" cy="3383280"/>
+            <a:off x="8092440" y="2788920"/>
+            <a:ext cx="3550615" cy="3429000"/>
           </a:xfrm>
           <a:prstGeom prst="roundRect">
             <a:avLst>
-              <a:gd name="adj" fmla="val 2162"/>
+              <a:gd name="adj" fmla="val 2133"/>
             </a:avLst>
           </a:prstGeom>
           <a:solidFill>
@@ -13196,8 +13286,8 @@
         </p:nvSpPr>
         <p:spPr>
           <a:xfrm>
-            <a:off x="8321040" y="2971800"/>
-            <a:ext cx="3093415" cy="365760"/>
+            <a:off x="8321040" y="2880360"/>
+            <a:ext cx="3093415" cy="310896"/>
           </a:xfrm>
           <a:prstGeom prst="rect">
             <a:avLst/>
@@ -13213,7 +13303,7 @@
               <a:buNone/>
             </a:pPr>
             <a:r>
-              <a:rPr lang="en-US" sz="1500" b="1" dirty="0">
+              <a:rPr lang="en-US" sz="1400" b="1" dirty="0">
                 <a:solidFill>
                   <a:srgbClr val="2F7D4F"/>
                 </a:solidFill>
@@ -13223,7 +13313,7 @@
               </a:rPr>
               <a:t>You should see</a:t>
             </a:r>
-            <a:endParaRPr lang="en-US" sz="1500" dirty="0"/>
+            <a:endParaRPr lang="en-US" sz="1400" dirty="0"/>
           </a:p>
         </p:txBody>
       </p:sp>
@@ -13235,8 +13325,8 @@
         </p:nvSpPr>
         <p:spPr>
           <a:xfrm>
-            <a:off x="8321040" y="3429000"/>
-            <a:ext cx="3093415" cy="2606040"/>
+            <a:off x="8321040" y="3246120"/>
+            <a:ext cx="3093415" cy="2862072"/>
           </a:xfrm>
           <a:prstGeom prst="rect">
             <a:avLst/>
@@ -13751,12 +13841,12 @@
         </p:nvSpPr>
         <p:spPr>
           <a:xfrm>
-            <a:off x="8092440" y="2834640"/>
-            <a:ext cx="3550615" cy="3383280"/>
+            <a:off x="8092440" y="2788920"/>
+            <a:ext cx="3550615" cy="3429000"/>
           </a:xfrm>
           <a:prstGeom prst="roundRect">
             <a:avLst>
-              <a:gd name="adj" fmla="val 2162"/>
+              <a:gd name="adj" fmla="val 2133"/>
             </a:avLst>
           </a:prstGeom>
           <a:solidFill>
@@ -13778,8 +13868,8 @@
         </p:nvSpPr>
         <p:spPr>
           <a:xfrm>
-            <a:off x="8321040" y="2971800"/>
-            <a:ext cx="3093415" cy="365760"/>
+            <a:off x="8321040" y="2880360"/>
+            <a:ext cx="3093415" cy="310896"/>
           </a:xfrm>
           <a:prstGeom prst="rect">
             <a:avLst/>
@@ -13795,7 +13885,7 @@
               <a:buNone/>
             </a:pPr>
             <a:r>
-              <a:rPr lang="en-US" sz="1500" b="1" dirty="0">
+              <a:rPr lang="en-US" sz="1400" b="1" dirty="0">
                 <a:solidFill>
                   <a:srgbClr val="2F7D4F"/>
                 </a:solidFill>
@@ -13805,7 +13895,7 @@
               </a:rPr>
               <a:t>You should see</a:t>
             </a:r>
-            <a:endParaRPr lang="en-US" sz="1500" dirty="0"/>
+            <a:endParaRPr lang="en-US" sz="1400" dirty="0"/>
           </a:p>
         </p:txBody>
       </p:sp>
@@ -13817,8 +13907,8 @@
         </p:nvSpPr>
         <p:spPr>
           <a:xfrm>
-            <a:off x="8321040" y="3429000"/>
-            <a:ext cx="3093415" cy="2606040"/>
+            <a:off x="8321040" y="3246120"/>
+            <a:ext cx="3093415" cy="2862072"/>
           </a:xfrm>
           <a:prstGeom prst="rect">
             <a:avLst/>
@@ -15006,12 +15096,12 @@
         </p:nvSpPr>
         <p:spPr>
           <a:xfrm>
-            <a:off x="8092440" y="2834640"/>
-            <a:ext cx="3550615" cy="3383280"/>
+            <a:off x="8092440" y="2788920"/>
+            <a:ext cx="3550615" cy="3429000"/>
           </a:xfrm>
           <a:prstGeom prst="roundRect">
             <a:avLst>
-              <a:gd name="adj" fmla="val 2162"/>
+              <a:gd name="adj" fmla="val 2133"/>
             </a:avLst>
           </a:prstGeom>
           <a:solidFill>
@@ -15033,8 +15123,8 @@
         </p:nvSpPr>
         <p:spPr>
           <a:xfrm>
-            <a:off x="8321040" y="2971800"/>
-            <a:ext cx="3093415" cy="365760"/>
+            <a:off x="8321040" y="2880360"/>
+            <a:ext cx="3093415" cy="310896"/>
           </a:xfrm>
           <a:prstGeom prst="rect">
             <a:avLst/>
@@ -15050,7 +15140,7 @@
               <a:buNone/>
             </a:pPr>
             <a:r>
-              <a:rPr lang="en-US" sz="1500" b="1" dirty="0">
+              <a:rPr lang="en-US" sz="1400" b="1" dirty="0">
                 <a:solidFill>
                   <a:srgbClr val="2F7D4F"/>
                 </a:solidFill>
@@ -15060,7 +15150,7 @@
               </a:rPr>
               <a:t>You should see</a:t>
             </a:r>
-            <a:endParaRPr lang="en-US" sz="1500" dirty="0"/>
+            <a:endParaRPr lang="en-US" sz="1400" dirty="0"/>
           </a:p>
         </p:txBody>
       </p:sp>
@@ -15072,8 +15162,8 @@
         </p:nvSpPr>
         <p:spPr>
           <a:xfrm>
-            <a:off x="8321040" y="3429000"/>
-            <a:ext cx="3093415" cy="2606040"/>
+            <a:off x="8321040" y="3246120"/>
+            <a:ext cx="3093415" cy="2862072"/>
           </a:xfrm>
           <a:prstGeom prst="rect">
             <a:avLst/>
@@ -15178,14 +15268,16 @@
       </p:grpSpPr>
       <p:sp>
         <p:nvSpPr>
-          <p:cNvPr id="2" name="Text 0"/>
-          <p:cNvSpPr txBox="1"/>
-          <p:nvPr/>
-        </p:nvSpPr>
-        <p:spPr>
-          <a:xfrm>
-            <a:off x="548640" y="1371600"/>
-            <a:ext cx="2743200" cy="1188720"/>
+          <p:cNvPr id="2" name="Text 1"/>
+          <p:cNvSpPr/>
+          <p:nvPr>
+            <p:ph idx="101" type="title" hasCustomPrompt="1"/>
+          </p:nvPr>
+        </p:nvSpPr>
+        <p:spPr>
+          <a:xfrm>
+            <a:off x="548640" y="384048"/>
+            <a:ext cx="11094415" cy="868680"/>
           </a:xfrm>
           <a:prstGeom prst="rect">
             <a:avLst/>
@@ -15194,37 +15286,61 @@
           <a:ln/>
         </p:spPr>
         <p:txBody>
-          <a:bodyPr wrap="square" lIns="0" tIns="0" rIns="0" bIns="0" rtlCol="0" anchor="t"/>
-          <a:lstStyle/>
-          <a:p>
-            <a:pPr indent="0" marL="0">
-              <a:buNone/>
-            </a:pPr>
-            <a:r>
-              <a:rPr lang="en-US" sz="8000" b="1" dirty="0">
-                <a:solidFill>
-                  <a:srgbClr val="B9A4E3"/>
+          <a:bodyPr wrap="square" lIns="0" tIns="0" rIns="0" bIns="0" rtlCol="0" anchor="ctr"/>
+          <a:lstStyle/>
+          <a:p>
+            <a:pPr algn="l" indent="0" marL="0">
+              <a:buNone/>
+            </a:pPr>
+            <a:r>
+              <a:rPr lang="en-US" sz="3000" b="1" dirty="0">
+                <a:solidFill>
+                  <a:srgbClr val="2E4A62"/>
                 </a:solidFill>
                 <a:latin typeface="Cambria" pitchFamily="34" charset="0"/>
                 <a:ea typeface="Cambria" pitchFamily="34" charset="-122"/>
                 <a:cs typeface="Cambria" pitchFamily="34" charset="-120"/>
               </a:rPr>
-              <a:t>03</a:t>
-            </a:r>
-            <a:endParaRPr lang="en-US" sz="8000" dirty="0"/>
-          </a:p>
-        </p:txBody>
-      </p:sp>
-      <p:sp>
-        <p:nvSpPr>
-          <p:cNvPr id="3" name="Text 1"/>
-          <p:cNvSpPr txBox="1"/>
-          <p:nvPr/>
-        </p:nvSpPr>
-        <p:spPr>
-          <a:xfrm>
-            <a:off x="548640" y="2834640"/>
-            <a:ext cx="11094415" cy="1371600"/>
+              <a:t>Lemon Catcher, for real</a:t>
+            </a:r>
+            <a:endParaRPr lang="en-US" sz="3000" dirty="0"/>
+          </a:p>
+        </p:txBody>
+      </p:sp>
+      <p:pic>
+        <p:nvPicPr>
+          <p:cNvPr id="3" name="Image 0" descr="The reference project, built from its generated C and run for 260 frames">    </p:cNvPr>
+          <p:cNvPicPr>
+            <a:picLocks noChangeAspect="1"/>
+          </p:cNvPicPr>
+          <p:nvPr/>
+        </p:nvPicPr>
+        <p:blipFill>
+          <a:blip r:embed="rId1"/>
+          <a:stretch>
+            <a:fillRect/>
+          </a:stretch>
+        </p:blipFill>
+        <p:spPr>
+          <a:xfrm>
+            <a:off x="2804008" y="1463040"/>
+            <a:ext cx="6583680" cy="4114800"/>
+          </a:xfrm>
+          <a:prstGeom prst="rect">
+            <a:avLst/>
+          </a:prstGeom>
+        </p:spPr>
+      </p:pic>
+      <p:sp>
+        <p:nvSpPr>
+          <p:cNvPr id="4" name="Text 1"/>
+          <p:cNvSpPr txBox="1"/>
+          <p:nvPr/>
+        </p:nvSpPr>
+        <p:spPr>
+          <a:xfrm>
+            <a:off x="548640" y="5715000"/>
+            <a:ext cx="11094415" cy="457200"/>
           </a:xfrm>
           <a:prstGeom prst="rect">
             <a:avLst/>
@@ -15233,63 +15349,24 @@
           <a:ln/>
         </p:spPr>
         <p:txBody>
-          <a:bodyPr wrap="square" lIns="0" tIns="0" rIns="0" bIns="0" rtlCol="0" anchor="ctr"/>
-          <a:lstStyle/>
-          <a:p>
-            <a:pPr indent="0" marL="0">
-              <a:buNone/>
-            </a:pPr>
-            <a:r>
-              <a:rPr lang="en-US" sz="4200" b="1" dirty="0">
-                <a:solidFill>
-                  <a:srgbClr val="FFFFFF"/>
-                </a:solidFill>
-                <a:latin typeface="Cambria" pitchFamily="34" charset="0"/>
-                <a:ea typeface="Cambria" pitchFamily="34" charset="-122"/>
-                <a:cs typeface="Cambria" pitchFamily="34" charset="-120"/>
-              </a:rPr>
-              <a:t>Make it yours</a:t>
-            </a:r>
-            <a:endParaRPr lang="en-US" sz="4200" dirty="0"/>
-          </a:p>
-        </p:txBody>
-      </p:sp>
-      <p:sp>
-        <p:nvSpPr>
-          <p:cNvPr id="4" name="Text 2"/>
-          <p:cNvSpPr txBox="1"/>
-          <p:nvPr/>
-        </p:nvSpPr>
-        <p:spPr>
-          <a:xfrm>
-            <a:off x="548640" y="4389120"/>
-            <a:ext cx="11094415" cy="1097280"/>
-          </a:xfrm>
-          <a:prstGeom prst="rect">
-            <a:avLst/>
-          </a:prstGeom>
-          <a:noFill/>
-          <a:ln/>
-        </p:spPr>
-        <p:txBody>
           <a:bodyPr wrap="square" lIns="0" tIns="0" rIns="0" bIns="0" rtlCol="0" anchor="t"/>
           <a:lstStyle/>
           <a:p>
-            <a:pPr indent="0" marL="0">
-              <a:buNone/>
-            </a:pPr>
-            <a:r>
-              <a:rPr lang="en-US" sz="2200" dirty="0">
-                <a:solidFill>
-                  <a:srgbClr val="CFE3EA"/>
-                </a:solidFill>
-                <a:latin typeface="Calibri" pitchFamily="34" charset="0"/>
-                <a:ea typeface="Calibri" pitchFamily="34" charset="-122"/>
-                <a:cs typeface="Calibri" pitchFamily="34" charset="-120"/>
-              </a:rPr>
-              <a:t>Your game, your rules</a:t>
-            </a:r>
-            <a:endParaRPr lang="en-US" sz="2200" dirty="0"/>
+            <a:pPr algn="ctr" indent="0" marL="0">
+              <a:buNone/>
+            </a:pPr>
+            <a:r>
+              <a:rPr lang="en-US" sz="1400" i="1" dirty="0">
+                <a:solidFill>
+                  <a:srgbClr val="5B6B78"/>
+                </a:solidFill>
+                <a:latin typeface="Calibri" pitchFamily="34" charset="0"/>
+                <a:ea typeface="Calibri" pitchFamily="34" charset="-122"/>
+                <a:cs typeface="Calibri" pitchFamily="34" charset="-120"/>
+              </a:rPr>
+              <a:t>The reference project, built from its generated C and run for 260 frames</a:t>
+            </a:r>
+            <a:endParaRPr lang="en-US" sz="1400" dirty="0"/>
           </a:p>
         </p:txBody>
       </p:sp>
@@ -15323,7 +15400,7 @@
             <a:lvl1pPr>
               <a:defRPr sz="1000">
                 <a:solidFill>
-                  <a:srgbClr val="CFE3EA"/>
+                  <a:srgbClr val="5B6B78"/>
                 </a:solidFill>
                 <a:latin typeface="Calibri"/>
                 <a:ea typeface="Calibri"/>
@@ -15368,16 +15445,14 @@
       </p:grpSpPr>
       <p:sp>
         <p:nvSpPr>
-          <p:cNvPr id="2" name="Text 1"/>
-          <p:cNvSpPr/>
-          <p:nvPr>
-            <p:ph idx="101" type="title" hasCustomPrompt="1"/>
-          </p:nvPr>
-        </p:nvSpPr>
-        <p:spPr>
-          <a:xfrm>
-            <a:off x="548640" y="384048"/>
-            <a:ext cx="11094415" cy="868680"/>
+          <p:cNvPr id="2" name="Text 0"/>
+          <p:cNvSpPr txBox="1"/>
+          <p:nvPr/>
+        </p:nvSpPr>
+        <p:spPr>
+          <a:xfrm>
+            <a:off x="548640" y="1371600"/>
+            <a:ext cx="2743200" cy="1188720"/>
           </a:xfrm>
           <a:prstGeom prst="rect">
             <a:avLst/>
@@ -15386,24 +15461,24 @@
           <a:ln/>
         </p:spPr>
         <p:txBody>
-          <a:bodyPr wrap="square" lIns="0" tIns="0" rIns="0" bIns="0" rtlCol="0" anchor="ctr"/>
-          <a:lstStyle/>
-          <a:p>
-            <a:pPr algn="l" indent="0" marL="0">
-              <a:buNone/>
-            </a:pPr>
-            <a:r>
-              <a:rPr lang="en-US" sz="3000" b="1" dirty="0">
-                <a:solidFill>
-                  <a:srgbClr val="2E4A62"/>
+          <a:bodyPr wrap="square" lIns="0" tIns="0" rIns="0" bIns="0" rtlCol="0" anchor="t"/>
+          <a:lstStyle/>
+          <a:p>
+            <a:pPr indent="0" marL="0">
+              <a:buNone/>
+            </a:pPr>
+            <a:r>
+              <a:rPr lang="en-US" sz="8000" b="1" dirty="0">
+                <a:solidFill>
+                  <a:srgbClr val="B9A4E3"/>
                 </a:solidFill>
                 <a:latin typeface="Cambria" pitchFamily="34" charset="0"/>
                 <a:ea typeface="Cambria" pitchFamily="34" charset="-122"/>
                 <a:cs typeface="Cambria" pitchFamily="34" charset="-120"/>
               </a:rPr>
-              <a:t>Choose your changes</a:t>
-            </a:r>
-            <a:endParaRPr lang="en-US" sz="3000" dirty="0"/>
+              <a:t>03</a:t>
+            </a:r>
+            <a:endParaRPr lang="en-US" sz="8000" dirty="0"/>
           </a:p>
         </p:txBody>
       </p:sp>
@@ -15415,55 +15490,8 @@
         </p:nvSpPr>
         <p:spPr>
           <a:xfrm>
-            <a:off x="548640" y="1481328"/>
-            <a:ext cx="438912" cy="438912"/>
-          </a:xfrm>
-          <a:prstGeom prst="roundRect">
-            <a:avLst>
-              <a:gd name="adj" fmla="val 16667"/>
-            </a:avLst>
-          </a:prstGeom>
-          <a:solidFill>
-            <a:srgbClr val="6B4FA0"/>
-          </a:solidFill>
-          <a:ln>
-            <a:solidFill>
-              <a:srgbClr val="6B4FA0"/>
-            </a:solidFill>
-          </a:ln>
-        </p:spPr>
-        <p:txBody>
-          <a:bodyPr wrap="square" lIns="0" tIns="0" rIns="0" bIns="0" rtlCol="0" anchor="ctr"/>
-          <a:lstStyle/>
-          <a:p>
-            <a:pPr algn="ctr" indent="0" marL="0">
-              <a:buNone/>
-            </a:pPr>
-            <a:r>
-              <a:rPr lang="en-US" sz="1600" b="1" dirty="0">
-                <a:solidFill>
-                  <a:srgbClr val="FFFFFF"/>
-                </a:solidFill>
-                <a:latin typeface="Calibri" pitchFamily="34" charset="0"/>
-                <a:ea typeface="Calibri" pitchFamily="34" charset="-122"/>
-                <a:cs typeface="Calibri" pitchFamily="34" charset="-120"/>
-              </a:rPr>
-              <a:t>1</a:t>
-            </a:r>
-            <a:endParaRPr lang="en-US" sz="1600" dirty="0"/>
-          </a:p>
-        </p:txBody>
-      </p:sp>
-      <p:sp>
-        <p:nvSpPr>
-          <p:cNvPr id="4" name="Text 2"/>
-          <p:cNvSpPr txBox="1"/>
-          <p:nvPr/>
-        </p:nvSpPr>
-        <p:spPr>
-          <a:xfrm>
-            <a:off x="1234440" y="1463040"/>
-            <a:ext cx="6446520" cy="475488"/>
+            <a:off x="548640" y="2834640"/>
+            <a:ext cx="11094415" cy="1371600"/>
           </a:xfrm>
           <a:prstGeom prst="rect">
             <a:avLst/>
@@ -15479,331 +15507,7 @@
               <a:buNone/>
             </a:pPr>
             <a:r>
-              <a:rPr lang="en-US" sz="2400" dirty="0">
-                <a:solidFill>
-                  <a:srgbClr val="1B2530"/>
-                </a:solidFill>
-                <a:latin typeface="Calibri" pitchFamily="34" charset="0"/>
-                <a:ea typeface="Calibri" pitchFamily="34" charset="-122"/>
-                <a:cs typeface="Calibri" pitchFamily="34" charset="-120"/>
-              </a:rPr>
-              <a:t>Make the lemon fall faster</a:t>
-            </a:r>
-            <a:endParaRPr lang="en-US" sz="2400" dirty="0"/>
-          </a:p>
-        </p:txBody>
-      </p:sp>
-      <p:sp>
-        <p:nvSpPr>
-          <p:cNvPr id="5" name="Text 3"/>
-          <p:cNvSpPr txBox="1"/>
-          <p:nvPr/>
-        </p:nvSpPr>
-        <p:spPr>
-          <a:xfrm>
-            <a:off x="548640" y="2706624"/>
-            <a:ext cx="438912" cy="438912"/>
-          </a:xfrm>
-          <a:prstGeom prst="roundRect">
-            <a:avLst>
-              <a:gd name="adj" fmla="val 16667"/>
-            </a:avLst>
-          </a:prstGeom>
-          <a:solidFill>
-            <a:srgbClr val="6B4FA0"/>
-          </a:solidFill>
-          <a:ln>
-            <a:solidFill>
-              <a:srgbClr val="6B4FA0"/>
-            </a:solidFill>
-          </a:ln>
-        </p:spPr>
-        <p:txBody>
-          <a:bodyPr wrap="square" lIns="0" tIns="0" rIns="0" bIns="0" rtlCol="0" anchor="ctr"/>
-          <a:lstStyle/>
-          <a:p>
-            <a:pPr algn="ctr" indent="0" marL="0">
-              <a:buNone/>
-            </a:pPr>
-            <a:r>
-              <a:rPr lang="en-US" sz="1600" b="1" dirty="0">
-                <a:solidFill>
-                  <a:srgbClr val="FFFFFF"/>
-                </a:solidFill>
-                <a:latin typeface="Calibri" pitchFamily="34" charset="0"/>
-                <a:ea typeface="Calibri" pitchFamily="34" charset="-122"/>
-                <a:cs typeface="Calibri" pitchFamily="34" charset="-120"/>
-              </a:rPr>
-              <a:t>2</a:t>
-            </a:r>
-            <a:endParaRPr lang="en-US" sz="1600" dirty="0"/>
-          </a:p>
-        </p:txBody>
-      </p:sp>
-      <p:sp>
-        <p:nvSpPr>
-          <p:cNvPr id="6" name="Text 4"/>
-          <p:cNvSpPr txBox="1"/>
-          <p:nvPr/>
-        </p:nvSpPr>
-        <p:spPr>
-          <a:xfrm>
-            <a:off x="1234440" y="2688336"/>
-            <a:ext cx="6446520" cy="1078992"/>
-          </a:xfrm>
-          <a:prstGeom prst="rect">
-            <a:avLst/>
-          </a:prstGeom>
-          <a:noFill/>
-          <a:ln/>
-        </p:spPr>
-        <p:txBody>
-          <a:bodyPr wrap="square" lIns="0" tIns="0" rIns="0" bIns="0" rtlCol="0" anchor="t"/>
-          <a:lstStyle/>
-          <a:p>
-            <a:pPr indent="0" marL="0">
-              <a:buNone/>
-            </a:pPr>
-            <a:r>
-              <a:rPr lang="en-US" sz="2400" dirty="0">
-                <a:solidFill>
-                  <a:srgbClr val="1B2530"/>
-                </a:solidFill>
-                <a:latin typeface="Calibri" pitchFamily="34" charset="0"/>
-                <a:ea typeface="Calibri" pitchFamily="34" charset="-122"/>
-                <a:cs typeface="Calibri" pitchFamily="34" charset="-120"/>
-              </a:rPr>
-              <a:t>Make the basket smaller (change draw AND touches!)</a:t>
-            </a:r>
-            <a:endParaRPr lang="en-US" sz="2400" dirty="0"/>
-          </a:p>
-        </p:txBody>
-      </p:sp>
-      <p:sp>
-        <p:nvSpPr>
-          <p:cNvPr id="7" name="Text 5"/>
-          <p:cNvSpPr txBox="1"/>
-          <p:nvPr/>
-        </p:nvSpPr>
-        <p:spPr>
-          <a:xfrm>
-            <a:off x="548640" y="3931920"/>
-            <a:ext cx="438912" cy="438912"/>
-          </a:xfrm>
-          <a:prstGeom prst="roundRect">
-            <a:avLst>
-              <a:gd name="adj" fmla="val 16667"/>
-            </a:avLst>
-          </a:prstGeom>
-          <a:solidFill>
-            <a:srgbClr val="6B4FA0"/>
-          </a:solidFill>
-          <a:ln>
-            <a:solidFill>
-              <a:srgbClr val="6B4FA0"/>
-            </a:solidFill>
-          </a:ln>
-        </p:spPr>
-        <p:txBody>
-          <a:bodyPr wrap="square" lIns="0" tIns="0" rIns="0" bIns="0" rtlCol="0" anchor="ctr"/>
-          <a:lstStyle/>
-          <a:p>
-            <a:pPr algn="ctr" indent="0" marL="0">
-              <a:buNone/>
-            </a:pPr>
-            <a:r>
-              <a:rPr lang="en-US" sz="1600" b="1" dirty="0">
-                <a:solidFill>
-                  <a:srgbClr val="FFFFFF"/>
-                </a:solidFill>
-                <a:latin typeface="Calibri" pitchFamily="34" charset="0"/>
-                <a:ea typeface="Calibri" pitchFamily="34" charset="-122"/>
-                <a:cs typeface="Calibri" pitchFamily="34" charset="-120"/>
-              </a:rPr>
-              <a:t>3</a:t>
-            </a:r>
-            <a:endParaRPr lang="en-US" sz="1600" dirty="0"/>
-          </a:p>
-        </p:txBody>
-      </p:sp>
-      <p:sp>
-        <p:nvSpPr>
-          <p:cNvPr id="8" name="Text 6"/>
-          <p:cNvSpPr txBox="1"/>
-          <p:nvPr/>
-        </p:nvSpPr>
-        <p:spPr>
-          <a:xfrm>
-            <a:off x="1234440" y="3913632"/>
-            <a:ext cx="6446520" cy="475488"/>
-          </a:xfrm>
-          <a:prstGeom prst="rect">
-            <a:avLst/>
-          </a:prstGeom>
-          <a:noFill/>
-          <a:ln/>
-        </p:spPr>
-        <p:txBody>
-          <a:bodyPr wrap="square" lIns="0" tIns="0" rIns="0" bIns="0" rtlCol="0" anchor="ctr"/>
-          <a:lstStyle/>
-          <a:p>
-            <a:pPr indent="0" marL="0">
-              <a:buNone/>
-            </a:pPr>
-            <a:r>
-              <a:rPr lang="en-US" sz="2400" dirty="0">
-                <a:solidFill>
-                  <a:srgbClr val="1B2530"/>
-                </a:solidFill>
-                <a:latin typeface="Calibri" pitchFamily="34" charset="0"/>
-                <a:ea typeface="Calibri" pitchFamily="34" charset="-122"/>
-                <a:cs typeface="Calibri" pitchFamily="34" charset="-120"/>
-              </a:rPr>
-              <a:t>Add a second fruit with its own boxes</a:t>
-            </a:r>
-            <a:endParaRPr lang="en-US" sz="2400" dirty="0"/>
-          </a:p>
-        </p:txBody>
-      </p:sp>
-      <p:sp>
-        <p:nvSpPr>
-          <p:cNvPr id="9" name="Text 7"/>
-          <p:cNvSpPr txBox="1"/>
-          <p:nvPr/>
-        </p:nvSpPr>
-        <p:spPr>
-          <a:xfrm>
-            <a:off x="548640" y="5157216"/>
-            <a:ext cx="438912" cy="438912"/>
-          </a:xfrm>
-          <a:prstGeom prst="roundRect">
-            <a:avLst>
-              <a:gd name="adj" fmla="val 16667"/>
-            </a:avLst>
-          </a:prstGeom>
-          <a:solidFill>
-            <a:srgbClr val="6B4FA0"/>
-          </a:solidFill>
-          <a:ln>
-            <a:solidFill>
-              <a:srgbClr val="6B4FA0"/>
-            </a:solidFill>
-          </a:ln>
-        </p:spPr>
-        <p:txBody>
-          <a:bodyPr wrap="square" lIns="0" tIns="0" rIns="0" bIns="0" rtlCol="0" anchor="ctr"/>
-          <a:lstStyle/>
-          <a:p>
-            <a:pPr algn="ctr" indent="0" marL="0">
-              <a:buNone/>
-            </a:pPr>
-            <a:r>
-              <a:rPr lang="en-US" sz="1600" b="1" dirty="0">
-                <a:solidFill>
-                  <a:srgbClr val="FFFFFF"/>
-                </a:solidFill>
-                <a:latin typeface="Calibri" pitchFamily="34" charset="0"/>
-                <a:ea typeface="Calibri" pitchFamily="34" charset="-122"/>
-                <a:cs typeface="Calibri" pitchFamily="34" charset="-120"/>
-              </a:rPr>
-              <a:t>4</a:t>
-            </a:r>
-            <a:endParaRPr lang="en-US" sz="1600" dirty="0"/>
-          </a:p>
-        </p:txBody>
-      </p:sp>
-      <p:sp>
-        <p:nvSpPr>
-          <p:cNvPr id="10" name="Text 8"/>
-          <p:cNvSpPr txBox="1"/>
-          <p:nvPr/>
-        </p:nvSpPr>
-        <p:spPr>
-          <a:xfrm>
-            <a:off x="1234440" y="5138928"/>
-            <a:ext cx="6446520" cy="475488"/>
-          </a:xfrm>
-          <a:prstGeom prst="rect">
-            <a:avLst/>
-          </a:prstGeom>
-          <a:noFill/>
-          <a:ln/>
-        </p:spPr>
-        <p:txBody>
-          <a:bodyPr wrap="square" lIns="0" tIns="0" rIns="0" bIns="0" rtlCol="0" anchor="ctr"/>
-          <a:lstStyle/>
-          <a:p>
-            <a:pPr indent="0" marL="0">
-              <a:buNone/>
-            </a:pPr>
-            <a:r>
-              <a:rPr lang="en-US" sz="2400" dirty="0">
-                <a:solidFill>
-                  <a:srgbClr val="1B2530"/>
-                </a:solidFill>
-                <a:latin typeface="Calibri" pitchFamily="34" charset="0"/>
-                <a:ea typeface="Calibri" pitchFamily="34" charset="-122"/>
-                <a:cs typeface="Calibri" pitchFamily="34" charset="-120"/>
-              </a:rPr>
-              <a:t>A 'bad' fruit: change score by -1</a:t>
-            </a:r>
-            <a:endParaRPr lang="en-US" sz="2400" dirty="0"/>
-          </a:p>
-        </p:txBody>
-      </p:sp>
-      <p:sp>
-        <p:nvSpPr>
-          <p:cNvPr id="11" name="Shape 9"/>
-          <p:cNvSpPr/>
-          <p:nvPr/>
-        </p:nvSpPr>
-        <p:spPr>
-          <a:xfrm>
-            <a:off x="8092440" y="1463040"/>
-            <a:ext cx="3550615" cy="1143000"/>
-          </a:xfrm>
-          <a:prstGeom prst="roundRect">
-            <a:avLst>
-              <a:gd name="adj" fmla="val 6400"/>
-            </a:avLst>
-          </a:prstGeom>
-          <a:solidFill>
-            <a:srgbClr val="1B2530"/>
-          </a:solidFill>
-          <a:ln w="12700">
-            <a:solidFill>
-              <a:srgbClr val="1B2530"/>
-            </a:solidFill>
-            <a:prstDash val="solid"/>
-          </a:ln>
-        </p:spPr>
-      </p:sp>
-      <p:sp>
-        <p:nvSpPr>
-          <p:cNvPr id="12" name="Text 10"/>
-          <p:cNvSpPr txBox="1"/>
-          <p:nvPr/>
-        </p:nvSpPr>
-        <p:spPr>
-          <a:xfrm>
-            <a:off x="8321040" y="1600200"/>
-            <a:ext cx="3093415" cy="457200"/>
-          </a:xfrm>
-          <a:prstGeom prst="rect">
-            <a:avLst/>
-          </a:prstGeom>
-          <a:noFill/>
-          <a:ln/>
-        </p:spPr>
-        <p:txBody>
-          <a:bodyPr wrap="square" lIns="0" tIns="0" rIns="0" bIns="0" rtlCol="0" anchor="t"/>
-          <a:lstStyle/>
-          <a:p>
-            <a:pPr indent="0" marL="0">
-              <a:buNone/>
-            </a:pPr>
-            <a:r>
-              <a:rPr lang="en-US" sz="2200" b="1" dirty="0">
+              <a:rPr lang="en-US" sz="4200" b="1" dirty="0">
                 <a:solidFill>
                   <a:srgbClr val="FFFFFF"/>
                 </a:solidFill>
@@ -15811,22 +15515,22 @@
                 <a:ea typeface="Cambria" pitchFamily="34" charset="-122"/>
                 <a:cs typeface="Cambria" pitchFamily="34" charset="-120"/>
               </a:rPr>
-              <a:t>Step 12</a:t>
-            </a:r>
-            <a:endParaRPr lang="en-US" sz="2200" dirty="0"/>
-          </a:p>
-        </p:txBody>
-      </p:sp>
-      <p:sp>
-        <p:nvSpPr>
-          <p:cNvPr id="13" name="Text 11"/>
-          <p:cNvSpPr txBox="1"/>
-          <p:nvPr/>
-        </p:nvSpPr>
-        <p:spPr>
-          <a:xfrm>
-            <a:off x="8321040" y="2084832"/>
-            <a:ext cx="3093415" cy="365760"/>
+              <a:t>Make it yours</a:t>
+            </a:r>
+            <a:endParaRPr lang="en-US" sz="4200" dirty="0"/>
+          </a:p>
+        </p:txBody>
+      </p:sp>
+      <p:sp>
+        <p:nvSpPr>
+          <p:cNvPr id="4" name="Text 2"/>
+          <p:cNvSpPr txBox="1"/>
+          <p:nvPr/>
+        </p:nvSpPr>
+        <p:spPr>
+          <a:xfrm>
+            <a:off x="548640" y="4389120"/>
+            <a:ext cx="11094415" cy="1097280"/>
           </a:xfrm>
           <a:prstGeom prst="rect">
             <a:avLst/>
@@ -15842,7 +15546,7 @@
               <a:buNone/>
             </a:pPr>
             <a:r>
-              <a:rPr lang="en-US" sz="1600" dirty="0">
+              <a:rPr lang="en-US" sz="2200" dirty="0">
                 <a:solidFill>
                   <a:srgbClr val="CFE3EA"/>
                 </a:solidFill>
@@ -15850,112 +15554,7 @@
                 <a:ea typeface="Calibri" pitchFamily="34" charset="-122"/>
                 <a:cs typeface="Calibri" pitchFamily="34" charset="-120"/>
               </a:rPr>
-              <a:t>about 8 min</a:t>
-            </a:r>
-            <a:endParaRPr lang="en-US" sz="1600" dirty="0"/>
-          </a:p>
-        </p:txBody>
-      </p:sp>
-      <p:sp>
-        <p:nvSpPr>
-          <p:cNvPr id="14" name="Shape 12"/>
-          <p:cNvSpPr/>
-          <p:nvPr/>
-        </p:nvSpPr>
-        <p:spPr>
-          <a:xfrm>
-            <a:off x="8092440" y="2834640"/>
-            <a:ext cx="3550615" cy="3383280"/>
-          </a:xfrm>
-          <a:prstGeom prst="roundRect">
-            <a:avLst>
-              <a:gd name="adj" fmla="val 2162"/>
-            </a:avLst>
-          </a:prstGeom>
-          <a:solidFill>
-            <a:srgbClr val="EEF2F4"/>
-          </a:solidFill>
-          <a:ln w="12700">
-            <a:solidFill>
-              <a:srgbClr val="EEF2F4"/>
-            </a:solidFill>
-            <a:prstDash val="solid"/>
-          </a:ln>
-        </p:spPr>
-      </p:sp>
-      <p:sp>
-        <p:nvSpPr>
-          <p:cNvPr id="15" name="Text 13"/>
-          <p:cNvSpPr txBox="1"/>
-          <p:nvPr/>
-        </p:nvSpPr>
-        <p:spPr>
-          <a:xfrm>
-            <a:off x="8321040" y="2971800"/>
-            <a:ext cx="3093415" cy="365760"/>
-          </a:xfrm>
-          <a:prstGeom prst="rect">
-            <a:avLst/>
-          </a:prstGeom>
-          <a:noFill/>
-          <a:ln/>
-        </p:spPr>
-        <p:txBody>
-          <a:bodyPr wrap="square" lIns="0" tIns="0" rIns="0" bIns="0" rtlCol="0" anchor="t"/>
-          <a:lstStyle/>
-          <a:p>
-            <a:pPr indent="0" marL="0">
-              <a:buNone/>
-            </a:pPr>
-            <a:r>
-              <a:rPr lang="en-US" sz="1500" b="1" dirty="0">
-                <a:solidFill>
-                  <a:srgbClr val="2F7D4F"/>
-                </a:solidFill>
-                <a:latin typeface="Calibri" pitchFamily="34" charset="0"/>
-                <a:ea typeface="Calibri" pitchFamily="34" charset="-122"/>
-                <a:cs typeface="Calibri" pitchFamily="34" charset="-120"/>
-              </a:rPr>
-              <a:t>You should see</a:t>
-            </a:r>
-            <a:endParaRPr lang="en-US" sz="1500" dirty="0"/>
-          </a:p>
-        </p:txBody>
-      </p:sp>
-      <p:sp>
-        <p:nvSpPr>
-          <p:cNvPr id="16" name="Text 14"/>
-          <p:cNvSpPr txBox="1"/>
-          <p:nvPr/>
-        </p:nvSpPr>
-        <p:spPr>
-          <a:xfrm>
-            <a:off x="8321040" y="3429000"/>
-            <a:ext cx="3093415" cy="2606040"/>
-          </a:xfrm>
-          <a:prstGeom prst="rect">
-            <a:avLst/>
-          </a:prstGeom>
-          <a:noFill/>
-          <a:ln/>
-        </p:spPr>
-        <p:txBody>
-          <a:bodyPr wrap="square" lIns="0" tIns="0" rIns="0" bIns="0" rtlCol="0" anchor="t"/>
-          <a:lstStyle/>
-          <a:p>
-            <a:pPr indent="0" marL="0">
-              <a:buNone/>
-            </a:pPr>
-            <a:r>
-              <a:rPr lang="en-US" sz="2200" dirty="0">
-                <a:solidFill>
-                  <a:srgbClr val="1B2530"/>
-                </a:solidFill>
-                <a:latin typeface="Calibri" pitchFamily="34" charset="0"/>
-                <a:ea typeface="Calibri" pitchFamily="34" charset="-122"/>
-                <a:cs typeface="Calibri" pitchFamily="34" charset="-120"/>
-              </a:rPr>
-              <a:t>Every pair has a different game. Be ready to say what you changed.</a:t>
+              <a:t>Your game, your rules</a:t>
             </a:r>
             <a:endParaRPr lang="en-US" sz="2200" dirty="0"/>
           </a:p>
@@ -15991,7 +15590,7 @@
             <a:lvl1pPr>
               <a:defRPr sz="1000">
                 <a:solidFill>
-                  <a:srgbClr val="5B6B78"/>
+                  <a:srgbClr val="CFE3EA"/>
                 </a:solidFill>
                 <a:latin typeface="Calibri"/>
                 <a:ea typeface="Calibri"/>
@@ -16069,7 +15668,7 @@
                 <a:ea typeface="Cambria" pitchFamily="34" charset="-122"/>
                 <a:cs typeface="Cambria" pitchFamily="34" charset="-120"/>
               </a:rPr>
-              <a:t>You did it!</a:t>
+              <a:t>Choose your changes</a:t>
             </a:r>
             <a:endParaRPr lang="en-US" sz="3000" dirty="0"/>
           </a:p>
@@ -16084,19 +15683,19 @@
         <p:spPr>
           <a:xfrm>
             <a:off x="548640" y="1481328"/>
-            <a:ext cx="457200" cy="457200"/>
+            <a:ext cx="438912" cy="438912"/>
           </a:xfrm>
           <a:prstGeom prst="roundRect">
             <a:avLst>
-              <a:gd name="adj" fmla="val 16000"/>
+              <a:gd name="adj" fmla="val 16667"/>
             </a:avLst>
           </a:prstGeom>
           <a:solidFill>
-            <a:srgbClr val="2F7D4F"/>
+            <a:srgbClr val="6B4FA0"/>
           </a:solidFill>
           <a:ln>
             <a:solidFill>
-              <a:srgbClr val="2F7D4F"/>
+              <a:srgbClr val="6B4FA0"/>
             </a:solidFill>
           </a:ln>
         </p:spPr>
@@ -16108,7 +15707,7 @@
               <a:buNone/>
             </a:pPr>
             <a:r>
-              <a:rPr lang="en-US" sz="1700" b="1" dirty="0">
+              <a:rPr lang="en-US" sz="1600" b="1" dirty="0">
                 <a:solidFill>
                   <a:srgbClr val="FFFFFF"/>
                 </a:solidFill>
@@ -16118,7 +15717,7 @@
               </a:rPr>
               <a:t>1</a:t>
             </a:r>
-            <a:endParaRPr lang="en-US" sz="1700" dirty="0"/>
+            <a:endParaRPr lang="en-US" sz="1600" dirty="0"/>
           </a:p>
         </p:txBody>
       </p:sp>
@@ -16130,8 +15729,8 @@
         </p:nvSpPr>
         <p:spPr>
           <a:xfrm>
-            <a:off x="1280160" y="1463040"/>
-            <a:ext cx="10362895" cy="493776"/>
+            <a:off x="1234440" y="1463040"/>
+            <a:ext cx="6446520" cy="475488"/>
           </a:xfrm>
           <a:prstGeom prst="rect">
             <a:avLst/>
@@ -16147,7 +15746,7 @@
               <a:buNone/>
             </a:pPr>
             <a:r>
-              <a:rPr lang="en-US" sz="2500" dirty="0">
+              <a:rPr lang="en-US" sz="2400" dirty="0">
                 <a:solidFill>
                   <a:srgbClr val="1B2530"/>
                 </a:solidFill>
@@ -16155,9 +15754,9 @@
                 <a:ea typeface="Calibri" pitchFamily="34" charset="-122"/>
                 <a:cs typeface="Calibri" pitchFamily="34" charset="-120"/>
               </a:rPr>
-              <a:t>Four-way movement</a:t>
-            </a:r>
-            <a:endParaRPr lang="en-US" sz="2500" dirty="0"/>
+              <a:t>Make the lemon fall faster</a:t>
+            </a:r>
+            <a:endParaRPr lang="en-US" sz="2400" dirty="0"/>
           </a:p>
         </p:txBody>
       </p:sp>
@@ -16169,20 +15768,20 @@
         </p:nvSpPr>
         <p:spPr>
           <a:xfrm>
-            <a:off x="548640" y="2465222"/>
-            <a:ext cx="457200" cy="457200"/>
+            <a:off x="548640" y="2706624"/>
+            <a:ext cx="438912" cy="438912"/>
           </a:xfrm>
           <a:prstGeom prst="roundRect">
             <a:avLst>
-              <a:gd name="adj" fmla="val 16000"/>
+              <a:gd name="adj" fmla="val 16667"/>
             </a:avLst>
           </a:prstGeom>
           <a:solidFill>
-            <a:srgbClr val="2F7D4F"/>
+            <a:srgbClr val="6B4FA0"/>
           </a:solidFill>
           <a:ln>
             <a:solidFill>
-              <a:srgbClr val="2F7D4F"/>
+              <a:srgbClr val="6B4FA0"/>
             </a:solidFill>
           </a:ln>
         </p:spPr>
@@ -16194,7 +15793,7 @@
               <a:buNone/>
             </a:pPr>
             <a:r>
-              <a:rPr lang="en-US" sz="1700" b="1" dirty="0">
+              <a:rPr lang="en-US" sz="1600" b="1" dirty="0">
                 <a:solidFill>
                   <a:srgbClr val="FFFFFF"/>
                 </a:solidFill>
@@ -16204,7 +15803,7 @@
               </a:rPr>
               <a:t>2</a:t>
             </a:r>
-            <a:endParaRPr lang="en-US" sz="1700" dirty="0"/>
+            <a:endParaRPr lang="en-US" sz="1600" dirty="0"/>
           </a:p>
         </p:txBody>
       </p:sp>
@@ -16216,8 +15815,8 @@
         </p:nvSpPr>
         <p:spPr>
           <a:xfrm>
-            <a:off x="1280160" y="2446934"/>
-            <a:ext cx="10362895" cy="493776"/>
+            <a:off x="1234440" y="2688336"/>
+            <a:ext cx="6446520" cy="1078992"/>
           </a:xfrm>
           <a:prstGeom prst="rect">
             <a:avLst/>
@@ -16226,14 +15825,14 @@
           <a:ln/>
         </p:spPr>
         <p:txBody>
-          <a:bodyPr wrap="square" lIns="0" tIns="0" rIns="0" bIns="0" rtlCol="0" anchor="ctr"/>
+          <a:bodyPr wrap="square" lIns="0" tIns="0" rIns="0" bIns="0" rtlCol="0" anchor="t"/>
           <a:lstStyle/>
           <a:p>
             <a:pPr indent="0" marL="0">
               <a:buNone/>
             </a:pPr>
             <a:r>
-              <a:rPr lang="en-US" sz="2500" dirty="0">
+              <a:rPr lang="en-US" sz="2400" dirty="0">
                 <a:solidFill>
                   <a:srgbClr val="1B2530"/>
                 </a:solidFill>
@@ -16241,9 +15840,9 @@
                 <a:ea typeface="Calibri" pitchFamily="34" charset="-122"/>
                 <a:cs typeface="Calibri" pitchFamily="34" charset="-120"/>
               </a:rPr>
-              <a:t>A fence</a:t>
-            </a:r>
-            <a:endParaRPr lang="en-US" sz="2500" dirty="0"/>
+              <a:t>Make the basket smaller (change draw AND touches!)</a:t>
+            </a:r>
+            <a:endParaRPr lang="en-US" sz="2400" dirty="0"/>
           </a:p>
         </p:txBody>
       </p:sp>
@@ -16255,20 +15854,20 @@
         </p:nvSpPr>
         <p:spPr>
           <a:xfrm>
-            <a:off x="548640" y="3449117"/>
-            <a:ext cx="457200" cy="457200"/>
+            <a:off x="548640" y="3931920"/>
+            <a:ext cx="438912" cy="438912"/>
           </a:xfrm>
           <a:prstGeom prst="roundRect">
             <a:avLst>
-              <a:gd name="adj" fmla="val 16000"/>
+              <a:gd name="adj" fmla="val 16667"/>
             </a:avLst>
           </a:prstGeom>
           <a:solidFill>
-            <a:srgbClr val="2F7D4F"/>
+            <a:srgbClr val="6B4FA0"/>
           </a:solidFill>
           <a:ln>
             <a:solidFill>
-              <a:srgbClr val="2F7D4F"/>
+              <a:srgbClr val="6B4FA0"/>
             </a:solidFill>
           </a:ln>
         </p:spPr>
@@ -16280,7 +15879,7 @@
               <a:buNone/>
             </a:pPr>
             <a:r>
-              <a:rPr lang="en-US" sz="1700" b="1" dirty="0">
+              <a:rPr lang="en-US" sz="1600" b="1" dirty="0">
                 <a:solidFill>
                   <a:srgbClr val="FFFFFF"/>
                 </a:solidFill>
@@ -16290,7 +15889,7 @@
               </a:rPr>
               <a:t>3</a:t>
             </a:r>
-            <a:endParaRPr lang="en-US" sz="1700" dirty="0"/>
+            <a:endParaRPr lang="en-US" sz="1600" dirty="0"/>
           </a:p>
         </p:txBody>
       </p:sp>
@@ -16302,8 +15901,8 @@
         </p:nvSpPr>
         <p:spPr>
           <a:xfrm>
-            <a:off x="1280160" y="3430829"/>
-            <a:ext cx="10362895" cy="493776"/>
+            <a:off x="1234440" y="3913632"/>
+            <a:ext cx="6446520" cy="475488"/>
           </a:xfrm>
           <a:prstGeom prst="rect">
             <a:avLst/>
@@ -16319,7 +15918,7 @@
               <a:buNone/>
             </a:pPr>
             <a:r>
-              <a:rPr lang="en-US" sz="2500" dirty="0">
+              <a:rPr lang="en-US" sz="2400" dirty="0">
                 <a:solidFill>
                   <a:srgbClr val="1B2530"/>
                 </a:solidFill>
@@ -16327,9 +15926,9 @@
                 <a:ea typeface="Calibri" pitchFamily="34" charset="-122"/>
                 <a:cs typeface="Calibri" pitchFamily="34" charset="-120"/>
               </a:rPr>
-              <a:t>Slow motion with Step</a:t>
-            </a:r>
-            <a:endParaRPr lang="en-US" sz="2500" dirty="0"/>
+              <a:t>Add a second fruit with its own boxes</a:t>
+            </a:r>
+            <a:endParaRPr lang="en-US" sz="2400" dirty="0"/>
           </a:p>
         </p:txBody>
       </p:sp>
@@ -16341,20 +15940,20 @@
         </p:nvSpPr>
         <p:spPr>
           <a:xfrm>
-            <a:off x="548640" y="4433011"/>
-            <a:ext cx="457200" cy="457200"/>
+            <a:off x="548640" y="5157216"/>
+            <a:ext cx="438912" cy="438912"/>
           </a:xfrm>
           <a:prstGeom prst="roundRect">
             <a:avLst>
-              <a:gd name="adj" fmla="val 16000"/>
+              <a:gd name="adj" fmla="val 16667"/>
             </a:avLst>
           </a:prstGeom>
           <a:solidFill>
-            <a:srgbClr val="2F7D4F"/>
+            <a:srgbClr val="6B4FA0"/>
           </a:solidFill>
           <a:ln>
             <a:solidFill>
-              <a:srgbClr val="2F7D4F"/>
+              <a:srgbClr val="6B4FA0"/>
             </a:solidFill>
           </a:ln>
         </p:spPr>
@@ -16366,7 +15965,7 @@
               <a:buNone/>
             </a:pPr>
             <a:r>
-              <a:rPr lang="en-US" sz="1700" b="1" dirty="0">
+              <a:rPr lang="en-US" sz="1600" b="1" dirty="0">
                 <a:solidFill>
                   <a:srgbClr val="FFFFFF"/>
                 </a:solidFill>
@@ -16376,7 +15975,7 @@
               </a:rPr>
               <a:t>4</a:t>
             </a:r>
-            <a:endParaRPr lang="en-US" sz="1700" dirty="0"/>
+            <a:endParaRPr lang="en-US" sz="1600" dirty="0"/>
           </a:p>
         </p:txBody>
       </p:sp>
@@ -16388,8 +15987,8 @@
         </p:nvSpPr>
         <p:spPr>
           <a:xfrm>
-            <a:off x="1280160" y="4414723"/>
-            <a:ext cx="10362895" cy="493776"/>
+            <a:off x="1234440" y="5138928"/>
+            <a:ext cx="6446520" cy="475488"/>
           </a:xfrm>
           <a:prstGeom prst="rect">
             <a:avLst/>
@@ -16405,7 +16004,7 @@
               <a:buNone/>
             </a:pPr>
             <a:r>
-              <a:rPr lang="en-US" sz="2500" dirty="0">
+              <a:rPr lang="en-US" sz="2400" dirty="0">
                 <a:solidFill>
                   <a:srgbClr val="1B2530"/>
                 </a:solidFill>
@@ -16413,58 +16012,38 @@
                 <a:ea typeface="Calibri" pitchFamily="34" charset="-122"/>
                 <a:cs typeface="Calibri" pitchFamily="34" charset="-120"/>
               </a:rPr>
-              <a:t>A falling lemon</a:t>
-            </a:r>
-            <a:endParaRPr lang="en-US" sz="2500" dirty="0"/>
-          </a:p>
-        </p:txBody>
-      </p:sp>
-      <p:sp>
-        <p:nvSpPr>
-          <p:cNvPr id="11" name="Text 9"/>
-          <p:cNvSpPr txBox="1"/>
-          <p:nvPr/>
-        </p:nvSpPr>
-        <p:spPr>
-          <a:xfrm>
-            <a:off x="548640" y="5416906"/>
-            <a:ext cx="457200" cy="457200"/>
+              <a:t>A 'bad' fruit: change score by -1</a:t>
+            </a:r>
+            <a:endParaRPr lang="en-US" sz="2400" dirty="0"/>
+          </a:p>
+        </p:txBody>
+      </p:sp>
+      <p:sp>
+        <p:nvSpPr>
+          <p:cNvPr id="11" name="Shape 9"/>
+          <p:cNvSpPr/>
+          <p:nvPr/>
+        </p:nvSpPr>
+        <p:spPr>
+          <a:xfrm>
+            <a:off x="8092440" y="1463040"/>
+            <a:ext cx="3550615" cy="1143000"/>
           </a:xfrm>
           <a:prstGeom prst="roundRect">
             <a:avLst>
-              <a:gd name="adj" fmla="val 16000"/>
+              <a:gd name="adj" fmla="val 6400"/>
             </a:avLst>
           </a:prstGeom>
           <a:solidFill>
-            <a:srgbClr val="2F7D4F"/>
+            <a:srgbClr val="1B2530"/>
           </a:solidFill>
-          <a:ln>
+          <a:ln w="12700">
             <a:solidFill>
-              <a:srgbClr val="2F7D4F"/>
+              <a:srgbClr val="1B2530"/>
             </a:solidFill>
+            <a:prstDash val="solid"/>
           </a:ln>
         </p:spPr>
-        <p:txBody>
-          <a:bodyPr wrap="square" lIns="0" tIns="0" rIns="0" bIns="0" rtlCol="0" anchor="ctr"/>
-          <a:lstStyle/>
-          <a:p>
-            <a:pPr algn="ctr" indent="0" marL="0">
-              <a:buNone/>
-            </a:pPr>
-            <a:r>
-              <a:rPr lang="en-US" sz="1700" b="1" dirty="0">
-                <a:solidFill>
-                  <a:srgbClr val="FFFFFF"/>
-                </a:solidFill>
-                <a:latin typeface="Calibri" pitchFamily="34" charset="0"/>
-                <a:ea typeface="Calibri" pitchFamily="34" charset="-122"/>
-                <a:cs typeface="Calibri" pitchFamily="34" charset="-120"/>
-              </a:rPr>
-              <a:t>5</a:t>
-            </a:r>
-            <a:endParaRPr lang="en-US" sz="1700" dirty="0"/>
-          </a:p>
-        </p:txBody>
       </p:sp>
       <p:sp>
         <p:nvSpPr>
@@ -16474,8 +16053,8 @@
         </p:nvSpPr>
         <p:spPr>
           <a:xfrm>
-            <a:off x="1280160" y="5398618"/>
-            <a:ext cx="10362895" cy="493776"/>
+            <a:off x="8321040" y="1600200"/>
+            <a:ext cx="3093415" cy="457200"/>
           </a:xfrm>
           <a:prstGeom prst="rect">
             <a:avLst/>
@@ -16484,14 +16063,158 @@
           <a:ln/>
         </p:spPr>
         <p:txBody>
-          <a:bodyPr wrap="square" lIns="0" tIns="0" rIns="0" bIns="0" rtlCol="0" anchor="ctr"/>
+          <a:bodyPr wrap="square" lIns="0" tIns="0" rIns="0" bIns="0" rtlCol="0" anchor="t"/>
           <a:lstStyle/>
           <a:p>
             <a:pPr indent="0" marL="0">
               <a:buNone/>
             </a:pPr>
             <a:r>
-              <a:rPr lang="en-US" sz="2500" dirty="0">
+              <a:rPr lang="en-US" sz="2200" b="1" dirty="0">
+                <a:solidFill>
+                  <a:srgbClr val="FFFFFF"/>
+                </a:solidFill>
+                <a:latin typeface="Cambria" pitchFamily="34" charset="0"/>
+                <a:ea typeface="Cambria" pitchFamily="34" charset="-122"/>
+                <a:cs typeface="Cambria" pitchFamily="34" charset="-120"/>
+              </a:rPr>
+              <a:t>Step 12</a:t>
+            </a:r>
+            <a:endParaRPr lang="en-US" sz="2200" dirty="0"/>
+          </a:p>
+        </p:txBody>
+      </p:sp>
+      <p:sp>
+        <p:nvSpPr>
+          <p:cNvPr id="13" name="Text 11"/>
+          <p:cNvSpPr txBox="1"/>
+          <p:nvPr/>
+        </p:nvSpPr>
+        <p:spPr>
+          <a:xfrm>
+            <a:off x="8321040" y="2084832"/>
+            <a:ext cx="3093415" cy="365760"/>
+          </a:xfrm>
+          <a:prstGeom prst="rect">
+            <a:avLst/>
+          </a:prstGeom>
+          <a:noFill/>
+          <a:ln/>
+        </p:spPr>
+        <p:txBody>
+          <a:bodyPr wrap="square" lIns="0" tIns="0" rIns="0" bIns="0" rtlCol="0" anchor="t"/>
+          <a:lstStyle/>
+          <a:p>
+            <a:pPr indent="0" marL="0">
+              <a:buNone/>
+            </a:pPr>
+            <a:r>
+              <a:rPr lang="en-US" sz="1600" dirty="0">
+                <a:solidFill>
+                  <a:srgbClr val="CFE3EA"/>
+                </a:solidFill>
+                <a:latin typeface="Calibri" pitchFamily="34" charset="0"/>
+                <a:ea typeface="Calibri" pitchFamily="34" charset="-122"/>
+                <a:cs typeface="Calibri" pitchFamily="34" charset="-120"/>
+              </a:rPr>
+              <a:t>about 8 min</a:t>
+            </a:r>
+            <a:endParaRPr lang="en-US" sz="1600" dirty="0"/>
+          </a:p>
+        </p:txBody>
+      </p:sp>
+      <p:sp>
+        <p:nvSpPr>
+          <p:cNvPr id="14" name="Shape 12"/>
+          <p:cNvSpPr/>
+          <p:nvPr/>
+        </p:nvSpPr>
+        <p:spPr>
+          <a:xfrm>
+            <a:off x="8092440" y="2788920"/>
+            <a:ext cx="3550615" cy="3429000"/>
+          </a:xfrm>
+          <a:prstGeom prst="roundRect">
+            <a:avLst>
+              <a:gd name="adj" fmla="val 2133"/>
+            </a:avLst>
+          </a:prstGeom>
+          <a:solidFill>
+            <a:srgbClr val="EEF2F4"/>
+          </a:solidFill>
+          <a:ln w="12700">
+            <a:solidFill>
+              <a:srgbClr val="EEF2F4"/>
+            </a:solidFill>
+            <a:prstDash val="solid"/>
+          </a:ln>
+        </p:spPr>
+      </p:sp>
+      <p:sp>
+        <p:nvSpPr>
+          <p:cNvPr id="15" name="Text 13"/>
+          <p:cNvSpPr txBox="1"/>
+          <p:nvPr/>
+        </p:nvSpPr>
+        <p:spPr>
+          <a:xfrm>
+            <a:off x="8321040" y="2880360"/>
+            <a:ext cx="3093415" cy="310896"/>
+          </a:xfrm>
+          <a:prstGeom prst="rect">
+            <a:avLst/>
+          </a:prstGeom>
+          <a:noFill/>
+          <a:ln/>
+        </p:spPr>
+        <p:txBody>
+          <a:bodyPr wrap="square" lIns="0" tIns="0" rIns="0" bIns="0" rtlCol="0" anchor="t"/>
+          <a:lstStyle/>
+          <a:p>
+            <a:pPr indent="0" marL="0">
+              <a:buNone/>
+            </a:pPr>
+            <a:r>
+              <a:rPr lang="en-US" sz="1400" b="1" dirty="0">
+                <a:solidFill>
+                  <a:srgbClr val="2F7D4F"/>
+                </a:solidFill>
+                <a:latin typeface="Calibri" pitchFamily="34" charset="0"/>
+                <a:ea typeface="Calibri" pitchFamily="34" charset="-122"/>
+                <a:cs typeface="Calibri" pitchFamily="34" charset="-120"/>
+              </a:rPr>
+              <a:t>You should see</a:t>
+            </a:r>
+            <a:endParaRPr lang="en-US" sz="1400" dirty="0"/>
+          </a:p>
+        </p:txBody>
+      </p:sp>
+      <p:sp>
+        <p:nvSpPr>
+          <p:cNvPr id="16" name="Text 14"/>
+          <p:cNvSpPr txBox="1"/>
+          <p:nvPr/>
+        </p:nvSpPr>
+        <p:spPr>
+          <a:xfrm>
+            <a:off x="8321040" y="3246120"/>
+            <a:ext cx="3093415" cy="2862072"/>
+          </a:xfrm>
+          <a:prstGeom prst="rect">
+            <a:avLst/>
+          </a:prstGeom>
+          <a:noFill/>
+          <a:ln/>
+        </p:spPr>
+        <p:txBody>
+          <a:bodyPr wrap="square" lIns="0" tIns="0" rIns="0" bIns="0" rtlCol="0" anchor="t"/>
+          <a:lstStyle/>
+          <a:p>
+            <a:pPr indent="0" marL="0">
+              <a:buNone/>
+            </a:pPr>
+            <a:r>
+              <a:rPr lang="en-US" sz="2200" dirty="0">
                 <a:solidFill>
                   <a:srgbClr val="1B2530"/>
                 </a:solidFill>
@@ -16499,9 +16222,9 @@
                 <a:ea typeface="Calibri" pitchFamily="34" charset="-122"/>
                 <a:cs typeface="Calibri" pitchFamily="34" charset="-120"/>
               </a:rPr>
-              <a:t>Catching, missing, and a score</a:t>
-            </a:r>
-            <a:endParaRPr lang="en-US" sz="2500" dirty="0"/>
+              <a:t>Every pair has a different game. Be ready to say what you changed.</a:t>
+            </a:r>
+            <a:endParaRPr lang="en-US" sz="2200" dirty="0"/>
           </a:p>
         </p:txBody>
       </p:sp>
@@ -17612,6 +17335,550 @@
                 <a:ea typeface="Cambria" pitchFamily="34" charset="-122"/>
                 <a:cs typeface="Cambria" pitchFamily="34" charset="-120"/>
               </a:rPr>
+              <a:t>You did it!</a:t>
+            </a:r>
+            <a:endParaRPr lang="en-US" sz="3000" dirty="0"/>
+          </a:p>
+        </p:txBody>
+      </p:sp>
+      <p:sp>
+        <p:nvSpPr>
+          <p:cNvPr id="3" name="Text 1"/>
+          <p:cNvSpPr txBox="1"/>
+          <p:nvPr/>
+        </p:nvSpPr>
+        <p:spPr>
+          <a:xfrm>
+            <a:off x="548640" y="1481328"/>
+            <a:ext cx="457200" cy="457200"/>
+          </a:xfrm>
+          <a:prstGeom prst="roundRect">
+            <a:avLst>
+              <a:gd name="adj" fmla="val 16000"/>
+            </a:avLst>
+          </a:prstGeom>
+          <a:solidFill>
+            <a:srgbClr val="2F7D4F"/>
+          </a:solidFill>
+          <a:ln>
+            <a:solidFill>
+              <a:srgbClr val="2F7D4F"/>
+            </a:solidFill>
+          </a:ln>
+        </p:spPr>
+        <p:txBody>
+          <a:bodyPr wrap="square" lIns="0" tIns="0" rIns="0" bIns="0" rtlCol="0" anchor="ctr"/>
+          <a:lstStyle/>
+          <a:p>
+            <a:pPr algn="ctr" indent="0" marL="0">
+              <a:buNone/>
+            </a:pPr>
+            <a:r>
+              <a:rPr lang="en-US" sz="1700" b="1" dirty="0">
+                <a:solidFill>
+                  <a:srgbClr val="FFFFFF"/>
+                </a:solidFill>
+                <a:latin typeface="Calibri" pitchFamily="34" charset="0"/>
+                <a:ea typeface="Calibri" pitchFamily="34" charset="-122"/>
+                <a:cs typeface="Calibri" pitchFamily="34" charset="-120"/>
+              </a:rPr>
+              <a:t>1</a:t>
+            </a:r>
+            <a:endParaRPr lang="en-US" sz="1700" dirty="0"/>
+          </a:p>
+        </p:txBody>
+      </p:sp>
+      <p:sp>
+        <p:nvSpPr>
+          <p:cNvPr id="4" name="Text 2"/>
+          <p:cNvSpPr txBox="1"/>
+          <p:nvPr/>
+        </p:nvSpPr>
+        <p:spPr>
+          <a:xfrm>
+            <a:off x="1280160" y="1463040"/>
+            <a:ext cx="10362895" cy="493776"/>
+          </a:xfrm>
+          <a:prstGeom prst="rect">
+            <a:avLst/>
+          </a:prstGeom>
+          <a:noFill/>
+          <a:ln/>
+        </p:spPr>
+        <p:txBody>
+          <a:bodyPr wrap="square" lIns="0" tIns="0" rIns="0" bIns="0" rtlCol="0" anchor="ctr"/>
+          <a:lstStyle/>
+          <a:p>
+            <a:pPr indent="0" marL="0">
+              <a:buNone/>
+            </a:pPr>
+            <a:r>
+              <a:rPr lang="en-US" sz="2500" dirty="0">
+                <a:solidFill>
+                  <a:srgbClr val="1B2530"/>
+                </a:solidFill>
+                <a:latin typeface="Calibri" pitchFamily="34" charset="0"/>
+                <a:ea typeface="Calibri" pitchFamily="34" charset="-122"/>
+                <a:cs typeface="Calibri" pitchFamily="34" charset="-120"/>
+              </a:rPr>
+              <a:t>Four-way movement</a:t>
+            </a:r>
+            <a:endParaRPr lang="en-US" sz="2500" dirty="0"/>
+          </a:p>
+        </p:txBody>
+      </p:sp>
+      <p:sp>
+        <p:nvSpPr>
+          <p:cNvPr id="5" name="Text 3"/>
+          <p:cNvSpPr txBox="1"/>
+          <p:nvPr/>
+        </p:nvSpPr>
+        <p:spPr>
+          <a:xfrm>
+            <a:off x="548640" y="2465222"/>
+            <a:ext cx="457200" cy="457200"/>
+          </a:xfrm>
+          <a:prstGeom prst="roundRect">
+            <a:avLst>
+              <a:gd name="adj" fmla="val 16000"/>
+            </a:avLst>
+          </a:prstGeom>
+          <a:solidFill>
+            <a:srgbClr val="2F7D4F"/>
+          </a:solidFill>
+          <a:ln>
+            <a:solidFill>
+              <a:srgbClr val="2F7D4F"/>
+            </a:solidFill>
+          </a:ln>
+        </p:spPr>
+        <p:txBody>
+          <a:bodyPr wrap="square" lIns="0" tIns="0" rIns="0" bIns="0" rtlCol="0" anchor="ctr"/>
+          <a:lstStyle/>
+          <a:p>
+            <a:pPr algn="ctr" indent="0" marL="0">
+              <a:buNone/>
+            </a:pPr>
+            <a:r>
+              <a:rPr lang="en-US" sz="1700" b="1" dirty="0">
+                <a:solidFill>
+                  <a:srgbClr val="FFFFFF"/>
+                </a:solidFill>
+                <a:latin typeface="Calibri" pitchFamily="34" charset="0"/>
+                <a:ea typeface="Calibri" pitchFamily="34" charset="-122"/>
+                <a:cs typeface="Calibri" pitchFamily="34" charset="-120"/>
+              </a:rPr>
+              <a:t>2</a:t>
+            </a:r>
+            <a:endParaRPr lang="en-US" sz="1700" dirty="0"/>
+          </a:p>
+        </p:txBody>
+      </p:sp>
+      <p:sp>
+        <p:nvSpPr>
+          <p:cNvPr id="6" name="Text 4"/>
+          <p:cNvSpPr txBox="1"/>
+          <p:nvPr/>
+        </p:nvSpPr>
+        <p:spPr>
+          <a:xfrm>
+            <a:off x="1280160" y="2446934"/>
+            <a:ext cx="10362895" cy="493776"/>
+          </a:xfrm>
+          <a:prstGeom prst="rect">
+            <a:avLst/>
+          </a:prstGeom>
+          <a:noFill/>
+          <a:ln/>
+        </p:spPr>
+        <p:txBody>
+          <a:bodyPr wrap="square" lIns="0" tIns="0" rIns="0" bIns="0" rtlCol="0" anchor="ctr"/>
+          <a:lstStyle/>
+          <a:p>
+            <a:pPr indent="0" marL="0">
+              <a:buNone/>
+            </a:pPr>
+            <a:r>
+              <a:rPr lang="en-US" sz="2500" dirty="0">
+                <a:solidFill>
+                  <a:srgbClr val="1B2530"/>
+                </a:solidFill>
+                <a:latin typeface="Calibri" pitchFamily="34" charset="0"/>
+                <a:ea typeface="Calibri" pitchFamily="34" charset="-122"/>
+                <a:cs typeface="Calibri" pitchFamily="34" charset="-120"/>
+              </a:rPr>
+              <a:t>A fence</a:t>
+            </a:r>
+            <a:endParaRPr lang="en-US" sz="2500" dirty="0"/>
+          </a:p>
+        </p:txBody>
+      </p:sp>
+      <p:sp>
+        <p:nvSpPr>
+          <p:cNvPr id="7" name="Text 5"/>
+          <p:cNvSpPr txBox="1"/>
+          <p:nvPr/>
+        </p:nvSpPr>
+        <p:spPr>
+          <a:xfrm>
+            <a:off x="548640" y="3449117"/>
+            <a:ext cx="457200" cy="457200"/>
+          </a:xfrm>
+          <a:prstGeom prst="roundRect">
+            <a:avLst>
+              <a:gd name="adj" fmla="val 16000"/>
+            </a:avLst>
+          </a:prstGeom>
+          <a:solidFill>
+            <a:srgbClr val="2F7D4F"/>
+          </a:solidFill>
+          <a:ln>
+            <a:solidFill>
+              <a:srgbClr val="2F7D4F"/>
+            </a:solidFill>
+          </a:ln>
+        </p:spPr>
+        <p:txBody>
+          <a:bodyPr wrap="square" lIns="0" tIns="0" rIns="0" bIns="0" rtlCol="0" anchor="ctr"/>
+          <a:lstStyle/>
+          <a:p>
+            <a:pPr algn="ctr" indent="0" marL="0">
+              <a:buNone/>
+            </a:pPr>
+            <a:r>
+              <a:rPr lang="en-US" sz="1700" b="1" dirty="0">
+                <a:solidFill>
+                  <a:srgbClr val="FFFFFF"/>
+                </a:solidFill>
+                <a:latin typeface="Calibri" pitchFamily="34" charset="0"/>
+                <a:ea typeface="Calibri" pitchFamily="34" charset="-122"/>
+                <a:cs typeface="Calibri" pitchFamily="34" charset="-120"/>
+              </a:rPr>
+              <a:t>3</a:t>
+            </a:r>
+            <a:endParaRPr lang="en-US" sz="1700" dirty="0"/>
+          </a:p>
+        </p:txBody>
+      </p:sp>
+      <p:sp>
+        <p:nvSpPr>
+          <p:cNvPr id="8" name="Text 6"/>
+          <p:cNvSpPr txBox="1"/>
+          <p:nvPr/>
+        </p:nvSpPr>
+        <p:spPr>
+          <a:xfrm>
+            <a:off x="1280160" y="3430829"/>
+            <a:ext cx="10362895" cy="493776"/>
+          </a:xfrm>
+          <a:prstGeom prst="rect">
+            <a:avLst/>
+          </a:prstGeom>
+          <a:noFill/>
+          <a:ln/>
+        </p:spPr>
+        <p:txBody>
+          <a:bodyPr wrap="square" lIns="0" tIns="0" rIns="0" bIns="0" rtlCol="0" anchor="ctr"/>
+          <a:lstStyle/>
+          <a:p>
+            <a:pPr indent="0" marL="0">
+              <a:buNone/>
+            </a:pPr>
+            <a:r>
+              <a:rPr lang="en-US" sz="2500" dirty="0">
+                <a:solidFill>
+                  <a:srgbClr val="1B2530"/>
+                </a:solidFill>
+                <a:latin typeface="Calibri" pitchFamily="34" charset="0"/>
+                <a:ea typeface="Calibri" pitchFamily="34" charset="-122"/>
+                <a:cs typeface="Calibri" pitchFamily="34" charset="-120"/>
+              </a:rPr>
+              <a:t>Slow motion with Step</a:t>
+            </a:r>
+            <a:endParaRPr lang="en-US" sz="2500" dirty="0"/>
+          </a:p>
+        </p:txBody>
+      </p:sp>
+      <p:sp>
+        <p:nvSpPr>
+          <p:cNvPr id="9" name="Text 7"/>
+          <p:cNvSpPr txBox="1"/>
+          <p:nvPr/>
+        </p:nvSpPr>
+        <p:spPr>
+          <a:xfrm>
+            <a:off x="548640" y="4433011"/>
+            <a:ext cx="457200" cy="457200"/>
+          </a:xfrm>
+          <a:prstGeom prst="roundRect">
+            <a:avLst>
+              <a:gd name="adj" fmla="val 16000"/>
+            </a:avLst>
+          </a:prstGeom>
+          <a:solidFill>
+            <a:srgbClr val="2F7D4F"/>
+          </a:solidFill>
+          <a:ln>
+            <a:solidFill>
+              <a:srgbClr val="2F7D4F"/>
+            </a:solidFill>
+          </a:ln>
+        </p:spPr>
+        <p:txBody>
+          <a:bodyPr wrap="square" lIns="0" tIns="0" rIns="0" bIns="0" rtlCol="0" anchor="ctr"/>
+          <a:lstStyle/>
+          <a:p>
+            <a:pPr algn="ctr" indent="0" marL="0">
+              <a:buNone/>
+            </a:pPr>
+            <a:r>
+              <a:rPr lang="en-US" sz="1700" b="1" dirty="0">
+                <a:solidFill>
+                  <a:srgbClr val="FFFFFF"/>
+                </a:solidFill>
+                <a:latin typeface="Calibri" pitchFamily="34" charset="0"/>
+                <a:ea typeface="Calibri" pitchFamily="34" charset="-122"/>
+                <a:cs typeface="Calibri" pitchFamily="34" charset="-120"/>
+              </a:rPr>
+              <a:t>4</a:t>
+            </a:r>
+            <a:endParaRPr lang="en-US" sz="1700" dirty="0"/>
+          </a:p>
+        </p:txBody>
+      </p:sp>
+      <p:sp>
+        <p:nvSpPr>
+          <p:cNvPr id="10" name="Text 8"/>
+          <p:cNvSpPr txBox="1"/>
+          <p:nvPr/>
+        </p:nvSpPr>
+        <p:spPr>
+          <a:xfrm>
+            <a:off x="1280160" y="4414723"/>
+            <a:ext cx="10362895" cy="493776"/>
+          </a:xfrm>
+          <a:prstGeom prst="rect">
+            <a:avLst/>
+          </a:prstGeom>
+          <a:noFill/>
+          <a:ln/>
+        </p:spPr>
+        <p:txBody>
+          <a:bodyPr wrap="square" lIns="0" tIns="0" rIns="0" bIns="0" rtlCol="0" anchor="ctr"/>
+          <a:lstStyle/>
+          <a:p>
+            <a:pPr indent="0" marL="0">
+              <a:buNone/>
+            </a:pPr>
+            <a:r>
+              <a:rPr lang="en-US" sz="2500" dirty="0">
+                <a:solidFill>
+                  <a:srgbClr val="1B2530"/>
+                </a:solidFill>
+                <a:latin typeface="Calibri" pitchFamily="34" charset="0"/>
+                <a:ea typeface="Calibri" pitchFamily="34" charset="-122"/>
+                <a:cs typeface="Calibri" pitchFamily="34" charset="-120"/>
+              </a:rPr>
+              <a:t>A falling lemon</a:t>
+            </a:r>
+            <a:endParaRPr lang="en-US" sz="2500" dirty="0"/>
+          </a:p>
+        </p:txBody>
+      </p:sp>
+      <p:sp>
+        <p:nvSpPr>
+          <p:cNvPr id="11" name="Text 9"/>
+          <p:cNvSpPr txBox="1"/>
+          <p:nvPr/>
+        </p:nvSpPr>
+        <p:spPr>
+          <a:xfrm>
+            <a:off x="548640" y="5416906"/>
+            <a:ext cx="457200" cy="457200"/>
+          </a:xfrm>
+          <a:prstGeom prst="roundRect">
+            <a:avLst>
+              <a:gd name="adj" fmla="val 16000"/>
+            </a:avLst>
+          </a:prstGeom>
+          <a:solidFill>
+            <a:srgbClr val="2F7D4F"/>
+          </a:solidFill>
+          <a:ln>
+            <a:solidFill>
+              <a:srgbClr val="2F7D4F"/>
+            </a:solidFill>
+          </a:ln>
+        </p:spPr>
+        <p:txBody>
+          <a:bodyPr wrap="square" lIns="0" tIns="0" rIns="0" bIns="0" rtlCol="0" anchor="ctr"/>
+          <a:lstStyle/>
+          <a:p>
+            <a:pPr algn="ctr" indent="0" marL="0">
+              <a:buNone/>
+            </a:pPr>
+            <a:r>
+              <a:rPr lang="en-US" sz="1700" b="1" dirty="0">
+                <a:solidFill>
+                  <a:srgbClr val="FFFFFF"/>
+                </a:solidFill>
+                <a:latin typeface="Calibri" pitchFamily="34" charset="0"/>
+                <a:ea typeface="Calibri" pitchFamily="34" charset="-122"/>
+                <a:cs typeface="Calibri" pitchFamily="34" charset="-120"/>
+              </a:rPr>
+              <a:t>5</a:t>
+            </a:r>
+            <a:endParaRPr lang="en-US" sz="1700" dirty="0"/>
+          </a:p>
+        </p:txBody>
+      </p:sp>
+      <p:sp>
+        <p:nvSpPr>
+          <p:cNvPr id="12" name="Text 10"/>
+          <p:cNvSpPr txBox="1"/>
+          <p:nvPr/>
+        </p:nvSpPr>
+        <p:spPr>
+          <a:xfrm>
+            <a:off x="1280160" y="5398618"/>
+            <a:ext cx="10362895" cy="493776"/>
+          </a:xfrm>
+          <a:prstGeom prst="rect">
+            <a:avLst/>
+          </a:prstGeom>
+          <a:noFill/>
+          <a:ln/>
+        </p:spPr>
+        <p:txBody>
+          <a:bodyPr wrap="square" lIns="0" tIns="0" rIns="0" bIns="0" rtlCol="0" anchor="ctr"/>
+          <a:lstStyle/>
+          <a:p>
+            <a:pPr indent="0" marL="0">
+              <a:buNone/>
+            </a:pPr>
+            <a:r>
+              <a:rPr lang="en-US" sz="2500" dirty="0">
+                <a:solidFill>
+                  <a:srgbClr val="1B2530"/>
+                </a:solidFill>
+                <a:latin typeface="Calibri" pitchFamily="34" charset="0"/>
+                <a:ea typeface="Calibri" pitchFamily="34" charset="-122"/>
+                <a:cs typeface="Calibri" pitchFamily="34" charset="-120"/>
+              </a:rPr>
+              <a:t>Catching, missing, and a score</a:t>
+            </a:r>
+            <a:endParaRPr lang="en-US" sz="2500" dirty="0"/>
+          </a:p>
+        </p:txBody>
+      </p:sp>
+      <p:sp>
+        <p:nvSpPr>
+          <p:cNvPr id="25" name="Slide Number Placeholder 0"/>
+          <p:cNvSpPr>
+            <a:spLocks noGrp="1"/>
+          </p:cNvSpPr>
+          <p:nvPr>
+            <p:ph type="sldNum" sz="quarter" idx="4294967295"/>
+          </p:nvPr>
+        </p:nvSpPr>
+        <p:spPr>
+          <a:xfrm>
+            <a:off x="11002975" y="6419088"/>
+            <a:ext cx="640080" cy="274320"/>
+          </a:xfrm>
+          <a:prstGeom prst="rect">
+            <a:avLst/>
+          </a:prstGeom>
+          <a:extLst>
+            <a:ext uri="{C572A759-6A51-4108-AA02-DFA0A04FC94B}">
+              <ma14:wrappingTextBoxFlag xmlns:ma14="http://schemas.microsoft.com/office/mac/drawingml/2011/main" val="0"/>
+            </a:ext>
+          </a:extLst>
+        </p:spPr>
+        <p:txBody>
+          <a:bodyPr/>
+          <a:lstStyle>
+            <a:lvl1pPr>
+              <a:defRPr sz="1000">
+                <a:solidFill>
+                  <a:srgbClr val="5B6B78"/>
+                </a:solidFill>
+                <a:latin typeface="Calibri"/>
+                <a:ea typeface="Calibri"/>
+                <a:cs typeface="Calibri"/>
+              </a:defRPr>
+            </a:lvl1pPr>
+          </a:lstStyle>
+          <a:p>
+            <a:pPr algn="r"/>
+            <a:fld id="{F7021451-1387-4CA6-816F-3879F97B5CBC}" type="slidenum">
+              <a:rPr b="0" lang="en-US"/>
+              <a:t>30</a:t>
+            </a:fld>
+            <a:endParaRPr lang="en-US"/>
+          </a:p>
+        </p:txBody>
+      </p:sp>
+    </p:spTree>
+  </p:cSld>
+  <p:clrMapOvr>
+    <a:masterClrMapping/>
+  </p:clrMapOvr>
+</p:sld>
+</file>
+
+<file path=ppt/slides/slide31.xml><?xml version="1.0" encoding="utf-8"?>
+<p:sld xmlns:a="http://schemas.openxmlformats.org/drawingml/2006/main" xmlns:r="http://schemas.openxmlformats.org/officeDocument/2006/relationships" xmlns:p="http://schemas.openxmlformats.org/presentationml/2006/main">
+  <p:cSld name="Slide 31">
+    <p:spTree>
+      <p:nvGrpSpPr>
+        <p:cNvPr id="1" name=""/>
+        <p:cNvGrpSpPr/>
+        <p:nvPr/>
+      </p:nvGrpSpPr>
+      <p:grpSpPr>
+        <a:xfrm>
+          <a:off x="0" y="0"/>
+          <a:ext cx="0" cy="0"/>
+          <a:chOff x="0" y="0"/>
+          <a:chExt cx="0" cy="0"/>
+        </a:xfrm>
+      </p:grpSpPr>
+      <p:sp>
+        <p:nvSpPr>
+          <p:cNvPr id="2" name="Text 1"/>
+          <p:cNvSpPr/>
+          <p:nvPr>
+            <p:ph idx="101" type="title" hasCustomPrompt="1"/>
+          </p:nvPr>
+        </p:nvSpPr>
+        <p:spPr>
+          <a:xfrm>
+            <a:off x="548640" y="384048"/>
+            <a:ext cx="11094415" cy="868680"/>
+          </a:xfrm>
+          <a:prstGeom prst="rect">
+            <a:avLst/>
+          </a:prstGeom>
+          <a:noFill/>
+          <a:ln/>
+        </p:spPr>
+        <p:txBody>
+          <a:bodyPr wrap="square" lIns="0" tIns="0" rIns="0" bIns="0" rtlCol="0" anchor="ctr"/>
+          <a:lstStyle/>
+          <a:p>
+            <a:pPr algn="l" indent="0" marL="0">
+              <a:buNone/>
+            </a:pPr>
+            <a:r>
+              <a:rPr lang="en-US" sz="3000" b="1" dirty="0">
+                <a:solidFill>
+                  <a:srgbClr val="2E4A62"/>
+                </a:solidFill>
+                <a:latin typeface="Cambria" pitchFamily="34" charset="0"/>
+                <a:ea typeface="Cambria" pitchFamily="34" charset="-122"/>
+                <a:cs typeface="Cambria" pitchFamily="34" charset="-120"/>
+              </a:rPr>
               <a:t>Next time, and for grown-ups</a:t>
             </a:r>
             <a:endParaRPr lang="en-US" sz="3000" dirty="0"/>
@@ -17999,7 +18266,7 @@
             <a:pPr algn="r"/>
             <a:fld id="{F7021451-1387-4CA6-816F-3879F97B5CBC}" type="slidenum">
               <a:rPr b="0" lang="en-US"/>
-              <a:t>30</a:t>
+              <a:t>31</a:t>
             </a:fld>
             <a:endParaRPr lang="en-US"/>
           </a:p>
@@ -19896,12 +20163,12 @@
         </p:nvSpPr>
         <p:spPr>
           <a:xfrm>
-            <a:off x="8092440" y="2834640"/>
-            <a:ext cx="3550615" cy="3383280"/>
+            <a:off x="8092440" y="2788920"/>
+            <a:ext cx="3550615" cy="3429000"/>
           </a:xfrm>
           <a:prstGeom prst="roundRect">
             <a:avLst>
-              <a:gd name="adj" fmla="val 2162"/>
+              <a:gd name="adj" fmla="val 2133"/>
             </a:avLst>
           </a:prstGeom>
           <a:solidFill>
@@ -19923,8 +20190,8 @@
         </p:nvSpPr>
         <p:spPr>
           <a:xfrm>
-            <a:off x="8321040" y="2971800"/>
-            <a:ext cx="3093415" cy="365760"/>
+            <a:off x="8321040" y="2880360"/>
+            <a:ext cx="3093415" cy="310896"/>
           </a:xfrm>
           <a:prstGeom prst="rect">
             <a:avLst/>
@@ -19940,7 +20207,7 @@
               <a:buNone/>
             </a:pPr>
             <a:r>
-              <a:rPr lang="en-US" sz="1500" b="1" dirty="0">
+              <a:rPr lang="en-US" sz="1400" b="1" dirty="0">
                 <a:solidFill>
                   <a:srgbClr val="2F7D4F"/>
                 </a:solidFill>
@@ -19950,7 +20217,7 @@
               </a:rPr>
               <a:t>You should see</a:t>
             </a:r>
-            <a:endParaRPr lang="en-US" sz="1500" dirty="0"/>
+            <a:endParaRPr lang="en-US" sz="1400" dirty="0"/>
           </a:p>
         </p:txBody>
       </p:sp>
@@ -19962,8 +20229,8 @@
         </p:nvSpPr>
         <p:spPr>
           <a:xfrm>
-            <a:off x="8321040" y="3429000"/>
-            <a:ext cx="3093415" cy="2606040"/>
+            <a:off x="8321040" y="3246120"/>
+            <a:ext cx="3093415" cy="2862072"/>
           </a:xfrm>
           <a:prstGeom prst="rect">
             <a:avLst/>
@@ -20564,12 +20831,12 @@
         </p:nvSpPr>
         <p:spPr>
           <a:xfrm>
-            <a:off x="8092440" y="2834640"/>
-            <a:ext cx="3550615" cy="3383280"/>
+            <a:off x="8092440" y="2788920"/>
+            <a:ext cx="3550615" cy="3429000"/>
           </a:xfrm>
           <a:prstGeom prst="roundRect">
             <a:avLst>
-              <a:gd name="adj" fmla="val 2162"/>
+              <a:gd name="adj" fmla="val 2133"/>
             </a:avLst>
           </a:prstGeom>
           <a:solidFill>
@@ -20591,8 +20858,8 @@
         </p:nvSpPr>
         <p:spPr>
           <a:xfrm>
-            <a:off x="8321040" y="2971800"/>
-            <a:ext cx="3093415" cy="365760"/>
+            <a:off x="8321040" y="2880360"/>
+            <a:ext cx="3093415" cy="310896"/>
           </a:xfrm>
           <a:prstGeom prst="rect">
             <a:avLst/>
@@ -20608,7 +20875,7 @@
               <a:buNone/>
             </a:pPr>
             <a:r>
-              <a:rPr lang="en-US" sz="1500" b="1" dirty="0">
+              <a:rPr lang="en-US" sz="1400" b="1" dirty="0">
                 <a:solidFill>
                   <a:srgbClr val="2F7D4F"/>
                 </a:solidFill>
@@ -20618,7 +20885,7 @@
               </a:rPr>
               <a:t>You should see</a:t>
             </a:r>
-            <a:endParaRPr lang="en-US" sz="1500" dirty="0"/>
+            <a:endParaRPr lang="en-US" sz="1400" dirty="0"/>
           </a:p>
         </p:txBody>
       </p:sp>
@@ -20630,8 +20897,8 @@
         </p:nvSpPr>
         <p:spPr>
           <a:xfrm>
-            <a:off x="8321040" y="3429000"/>
-            <a:ext cx="3093415" cy="2606040"/>
+            <a:off x="8321040" y="3246120"/>
+            <a:ext cx="3093415" cy="2862072"/>
           </a:xfrm>
           <a:prstGeom prst="rect">
             <a:avLst/>

--- a/presentations/13-kids-move-and-catch/13-kids-move-and-catch-lab.pptx
+++ b/presentations/13-kids-move-and-catch/13-kids-move-and-catch-lab.pptx
@@ -137,7 +137,7 @@
   <p:extLst>
     <p:ext uri="{521415D9-36F7-43E2-AB2F-B90AF26B5E84}">
       <p14:sectionLst xmlns:p14="http://schemas.microsoft.com/office/powerpoint/2010/main">
-        <p14:section name="Opening" id="{4980df97-fa9b-859a-7390-3e5dd2ae59d5}">
+        <p14:section name="Opening" id="{a3fddc1a-1532-e69f-c2c2-99bde20f4376}">
           <p14:sldIdLst>
             <p14:sldId id="256"/>
             <p14:sldId id="257"/>
@@ -145,7 +145,7 @@
             <p14:sldId id="259"/>
           </p14:sldIdLst>
         </p14:section>
-        <p14:section name="Mission 2" id="{649a1454-9e84-b6e8-46b8-eb04e602bbab}">
+        <p14:section name="Mission 2" id="{8e6062da-6568-dd2f-9f40-47d0ef3e966b}">
           <p14:sldIdLst>
             <p14:sldId id="260"/>
             <p14:sldId id="261"/>
@@ -158,7 +158,7 @@
             <p14:sldId id="268"/>
           </p14:sldIdLst>
         </p14:section>
-        <p14:section name="Mission 3" id="{329d82f9-a533-3e32-5d29-efe4afe6dc28}">
+        <p14:section name="Mission 3" id="{03e454ae-c9b2-7bc6-b79d-983864b2bca9}">
           <p14:sldIdLst>
             <p14:sldId id="269"/>
             <p14:sldId id="270"/>
@@ -176,14 +176,14 @@
             <p14:sldId id="282"/>
           </p14:sldIdLst>
         </p14:section>
-        <p14:section name="Make it yours" id="{1a838a45-652e-fe3e-f907-b472c49f74b1}">
+        <p14:section name="Make it yours" id="{12ee2a1c-7cce-2318-d834-eedba9bb8574}">
           <p14:sldIdLst>
             <p14:sldId id="283"/>
             <p14:sldId id="284"/>
             <p14:sldId id="285"/>
           </p14:sldIdLst>
         </p14:section>
-        <p14:section name="Closing" id="{36506f8a-730b-07d9-48b8-5229ac2fcf01}">
+        <p14:section name="Closing" id="{0596441f-2802-5b71-45f5-e53dca481326}">
           <p14:sldIdLst>
             <p14:sldId id="286"/>
           </p14:sldIdLst>
@@ -4958,7 +4958,7 @@
           </a:ln>
         </p:spPr>
         <p:txBody>
-          <a:bodyPr wrap="square" lIns="0" tIns="127000" rIns="101600" bIns="0" rtlCol="0" anchor="ctr"/>
+          <a:bodyPr wrap="square" lIns="88900" tIns="88900" rIns="88900" bIns="88900" rtlCol="0" anchor="ctr"/>
           <a:lstStyle/>
           <a:p>
             <a:pPr algn="l" indent="0" marL="0">
@@ -5005,7 +5005,7 @@
           </a:ln>
         </p:spPr>
         <p:txBody>
-          <a:bodyPr wrap="square" lIns="0" tIns="127000" rIns="101600" bIns="0" rtlCol="0" anchor="ctr"/>
+          <a:bodyPr wrap="square" lIns="88900" tIns="88900" rIns="88900" bIns="88900" rtlCol="0" anchor="ctr"/>
           <a:lstStyle/>
           <a:p>
             <a:pPr algn="l" indent="0" marL="0">
@@ -7645,7 +7645,7 @@
           </a:ln>
         </p:spPr>
         <p:txBody>
-          <a:bodyPr wrap="square" lIns="0" tIns="127000" rIns="101600" bIns="0" rtlCol="0" anchor="ctr"/>
+          <a:bodyPr wrap="square" lIns="88900" tIns="88900" rIns="88900" bIns="88900" rtlCol="0" anchor="ctr"/>
           <a:lstStyle/>
           <a:p>
             <a:pPr algn="l" indent="0" marL="0">
@@ -7692,7 +7692,7 @@
           </a:ln>
         </p:spPr>
         <p:txBody>
-          <a:bodyPr wrap="square" lIns="0" tIns="127000" rIns="101600" bIns="0" rtlCol="0" anchor="ctr"/>
+          <a:bodyPr wrap="square" lIns="88900" tIns="88900" rIns="88900" bIns="88900" rtlCol="0" anchor="ctr"/>
           <a:lstStyle/>
           <a:p>
             <a:pPr algn="l" indent="0" marL="0">
@@ -7739,7 +7739,7 @@
           </a:ln>
         </p:spPr>
         <p:txBody>
-          <a:bodyPr wrap="square" lIns="0" tIns="127000" rIns="101600" bIns="0" rtlCol="0" anchor="ctr"/>
+          <a:bodyPr wrap="square" lIns="88900" tIns="88900" rIns="88900" bIns="88900" rtlCol="0" anchor="ctr"/>
           <a:lstStyle/>
           <a:p>
             <a:pPr algn="l" indent="0" marL="0">
@@ -7786,7 +7786,7 @@
           </a:ln>
         </p:spPr>
         <p:txBody>
-          <a:bodyPr wrap="square" lIns="0" tIns="127000" rIns="101600" bIns="0" rtlCol="0" anchor="ctr"/>
+          <a:bodyPr wrap="square" lIns="88900" tIns="88900" rIns="88900" bIns="88900" rtlCol="0" anchor="ctr"/>
           <a:lstStyle/>
           <a:p>
             <a:pPr algn="l" indent="0" marL="0">
@@ -7833,7 +7833,7 @@
           </a:ln>
         </p:spPr>
         <p:txBody>
-          <a:bodyPr wrap="square" lIns="0" tIns="127000" rIns="101600" bIns="0" rtlCol="0" anchor="ctr"/>
+          <a:bodyPr wrap="square" lIns="88900" tIns="88900" rIns="88900" bIns="88900" rtlCol="0" anchor="ctr"/>
           <a:lstStyle/>
           <a:p>
             <a:pPr algn="l" indent="0" marL="0">
@@ -7880,7 +7880,7 @@
           </a:ln>
         </p:spPr>
         <p:txBody>
-          <a:bodyPr wrap="square" lIns="0" tIns="127000" rIns="101600" bIns="0" rtlCol="0" anchor="ctr"/>
+          <a:bodyPr wrap="square" lIns="88900" tIns="88900" rIns="88900" bIns="88900" rtlCol="0" anchor="ctr"/>
           <a:lstStyle/>
           <a:p>
             <a:pPr algn="l" indent="0" marL="0">
@@ -8326,7 +8326,7 @@
           </a:ln>
         </p:spPr>
         <p:txBody>
-          <a:bodyPr wrap="square" lIns="0" tIns="127000" rIns="101600" bIns="0" rtlCol="0" anchor="ctr"/>
+          <a:bodyPr wrap="square" lIns="88900" tIns="88900" rIns="88900" bIns="88900" rtlCol="0" anchor="ctr"/>
           <a:lstStyle/>
           <a:p>
             <a:pPr algn="l" indent="0" marL="0">
@@ -8373,7 +8373,7 @@
           </a:ln>
         </p:spPr>
         <p:txBody>
-          <a:bodyPr wrap="square" lIns="0" tIns="127000" rIns="101600" bIns="0" rtlCol="0" anchor="ctr"/>
+          <a:bodyPr wrap="square" lIns="88900" tIns="88900" rIns="88900" bIns="88900" rtlCol="0" anchor="ctr"/>
           <a:lstStyle/>
           <a:p>
             <a:pPr algn="l" indent="0" marL="0">
@@ -8420,7 +8420,7 @@
           </a:ln>
         </p:spPr>
         <p:txBody>
-          <a:bodyPr wrap="square" lIns="0" tIns="127000" rIns="101600" bIns="0" rtlCol="0" anchor="ctr"/>
+          <a:bodyPr wrap="square" lIns="88900" tIns="88900" rIns="88900" bIns="88900" rtlCol="0" anchor="ctr"/>
           <a:lstStyle/>
           <a:p>
             <a:pPr algn="l" indent="0" marL="0">
@@ -8467,7 +8467,7 @@
           </a:ln>
         </p:spPr>
         <p:txBody>
-          <a:bodyPr wrap="square" lIns="0" tIns="127000" rIns="101600" bIns="0" rtlCol="0" anchor="ctr"/>
+          <a:bodyPr wrap="square" lIns="88900" tIns="88900" rIns="88900" bIns="88900" rtlCol="0" anchor="ctr"/>
           <a:lstStyle/>
           <a:p>
             <a:pPr algn="l" indent="0" marL="0">
@@ -8514,7 +8514,7 @@
           </a:ln>
         </p:spPr>
         <p:txBody>
-          <a:bodyPr wrap="square" lIns="0" tIns="127000" rIns="101600" bIns="0" rtlCol="0" anchor="ctr"/>
+          <a:bodyPr wrap="square" lIns="88900" tIns="88900" rIns="88900" bIns="88900" rtlCol="0" anchor="ctr"/>
           <a:lstStyle/>
           <a:p>
             <a:pPr algn="l" indent="0" marL="0">
@@ -10786,7 +10786,7 @@
           </a:ln>
         </p:spPr>
         <p:txBody>
-          <a:bodyPr wrap="square" lIns="0" tIns="127000" rIns="101600" bIns="0" rtlCol="0" anchor="ctr"/>
+          <a:bodyPr wrap="square" lIns="88900" tIns="88900" rIns="88900" bIns="88900" rtlCol="0" anchor="ctr"/>
           <a:lstStyle/>
           <a:p>
             <a:pPr algn="l" indent="0" marL="0">
@@ -10833,7 +10833,7 @@
           </a:ln>
         </p:spPr>
         <p:txBody>
-          <a:bodyPr wrap="square" lIns="0" tIns="127000" rIns="101600" bIns="0" rtlCol="0" anchor="ctr"/>
+          <a:bodyPr wrap="square" lIns="88900" tIns="88900" rIns="88900" bIns="88900" rtlCol="0" anchor="ctr"/>
           <a:lstStyle/>
           <a:p>
             <a:pPr algn="l" indent="0" marL="0">
@@ -10880,7 +10880,7 @@
           </a:ln>
         </p:spPr>
         <p:txBody>
-          <a:bodyPr wrap="square" lIns="0" tIns="127000" rIns="101600" bIns="0" rtlCol="0" anchor="ctr"/>
+          <a:bodyPr wrap="square" lIns="88900" tIns="88900" rIns="88900" bIns="88900" rtlCol="0" anchor="ctr"/>
           <a:lstStyle/>
           <a:p>
             <a:pPr algn="l" indent="0" marL="0">
@@ -10927,7 +10927,7 @@
           </a:ln>
         </p:spPr>
         <p:txBody>
-          <a:bodyPr wrap="square" lIns="0" tIns="127000" rIns="101600" bIns="0" rtlCol="0" anchor="ctr"/>
+          <a:bodyPr wrap="square" lIns="88900" tIns="88900" rIns="88900" bIns="88900" rtlCol="0" anchor="ctr"/>
           <a:lstStyle/>
           <a:p>
             <a:pPr algn="l" indent="0" marL="0">
@@ -10974,7 +10974,7 @@
           </a:ln>
         </p:spPr>
         <p:txBody>
-          <a:bodyPr wrap="square" lIns="0" tIns="127000" rIns="101600" bIns="0" rtlCol="0" anchor="ctr"/>
+          <a:bodyPr wrap="square" lIns="88900" tIns="88900" rIns="88900" bIns="88900" rtlCol="0" anchor="ctr"/>
           <a:lstStyle/>
           <a:p>
             <a:pPr algn="l" indent="0" marL="0">
@@ -11021,7 +11021,7 @@
           </a:ln>
         </p:spPr>
         <p:txBody>
-          <a:bodyPr wrap="square" lIns="0" tIns="127000" rIns="101600" bIns="0" rtlCol="0" anchor="ctr"/>
+          <a:bodyPr wrap="square" lIns="88900" tIns="88900" rIns="88900" bIns="88900" rtlCol="0" anchor="ctr"/>
           <a:lstStyle/>
           <a:p>
             <a:pPr algn="l" indent="0" marL="0">
@@ -11068,7 +11068,7 @@
           </a:ln>
         </p:spPr>
         <p:txBody>
-          <a:bodyPr wrap="square" lIns="0" tIns="127000" rIns="101600" bIns="0" rtlCol="0" anchor="ctr"/>
+          <a:bodyPr wrap="square" lIns="88900" tIns="88900" rIns="88900" bIns="88900" rtlCol="0" anchor="ctr"/>
           <a:lstStyle/>
           <a:p>
             <a:pPr algn="l" indent="0" marL="0">
@@ -12182,7 +12182,7 @@
           </a:ln>
         </p:spPr>
         <p:txBody>
-          <a:bodyPr wrap="square" lIns="0" tIns="127000" rIns="101600" bIns="0" rtlCol="0" anchor="ctr"/>
+          <a:bodyPr wrap="square" lIns="88900" tIns="88900" rIns="88900" bIns="88900" rtlCol="0" anchor="ctr"/>
           <a:lstStyle/>
           <a:p>
             <a:pPr algn="l" indent="0" marL="0">
@@ -12229,7 +12229,7 @@
           </a:ln>
         </p:spPr>
         <p:txBody>
-          <a:bodyPr wrap="square" lIns="0" tIns="127000" rIns="101600" bIns="0" rtlCol="0" anchor="ctr"/>
+          <a:bodyPr wrap="square" lIns="88900" tIns="88900" rIns="88900" bIns="88900" rtlCol="0" anchor="ctr"/>
           <a:lstStyle/>
           <a:p>
             <a:pPr algn="l" indent="0" marL="0">
@@ -12276,7 +12276,7 @@
           </a:ln>
         </p:spPr>
         <p:txBody>
-          <a:bodyPr wrap="square" lIns="0" tIns="127000" rIns="101600" bIns="0" rtlCol="0" anchor="ctr"/>
+          <a:bodyPr wrap="square" lIns="88900" tIns="88900" rIns="88900" bIns="88900" rtlCol="0" anchor="ctr"/>
           <a:lstStyle/>
           <a:p>
             <a:pPr algn="l" indent="0" marL="0">
@@ -12323,7 +12323,7 @@
           </a:ln>
         </p:spPr>
         <p:txBody>
-          <a:bodyPr wrap="square" lIns="0" tIns="127000" rIns="101600" bIns="0" rtlCol="0" anchor="ctr"/>
+          <a:bodyPr wrap="square" lIns="88900" tIns="88900" rIns="88900" bIns="88900" rtlCol="0" anchor="ctr"/>
           <a:lstStyle/>
           <a:p>
             <a:pPr algn="l" indent="0" marL="0">
@@ -14105,7 +14105,7 @@
           </a:ln>
         </p:spPr>
         <p:txBody>
-          <a:bodyPr wrap="square" lIns="0" tIns="127000" rIns="101600" bIns="0" rtlCol="0" anchor="ctr"/>
+          <a:bodyPr wrap="square" lIns="88900" tIns="88900" rIns="88900" bIns="88900" rtlCol="0" anchor="ctr"/>
           <a:lstStyle/>
           <a:p>
             <a:pPr algn="l" indent="0" marL="0">
@@ -14152,7 +14152,7 @@
           </a:ln>
         </p:spPr>
         <p:txBody>
-          <a:bodyPr wrap="square" lIns="0" tIns="127000" rIns="101600" bIns="0" rtlCol="0" anchor="ctr"/>
+          <a:bodyPr wrap="square" lIns="88900" tIns="88900" rIns="88900" bIns="88900" rtlCol="0" anchor="ctr"/>
           <a:lstStyle/>
           <a:p>
             <a:pPr algn="l" indent="0" marL="0">
@@ -14199,7 +14199,7 @@
           </a:ln>
         </p:spPr>
         <p:txBody>
-          <a:bodyPr wrap="square" lIns="0" tIns="127000" rIns="101600" bIns="0" rtlCol="0" anchor="ctr"/>
+          <a:bodyPr wrap="square" lIns="88900" tIns="88900" rIns="88900" bIns="88900" rtlCol="0" anchor="ctr"/>
           <a:lstStyle/>
           <a:p>
             <a:pPr algn="l" indent="0" marL="0">
@@ -14246,7 +14246,7 @@
           </a:ln>
         </p:spPr>
         <p:txBody>
-          <a:bodyPr wrap="square" lIns="0" tIns="127000" rIns="101600" bIns="0" rtlCol="0" anchor="ctr"/>
+          <a:bodyPr wrap="square" lIns="88900" tIns="88900" rIns="88900" bIns="88900" rtlCol="0" anchor="ctr"/>
           <a:lstStyle/>
           <a:p>
             <a:pPr algn="l" indent="0" marL="0">
@@ -19039,7 +19039,7 @@
           </a:ln>
         </p:spPr>
         <p:txBody>
-          <a:bodyPr wrap="square" lIns="0" tIns="127000" rIns="101600" bIns="0" rtlCol="0" anchor="ctr"/>
+          <a:bodyPr wrap="square" lIns="88900" tIns="88900" rIns="88900" bIns="88900" rtlCol="0" anchor="ctr"/>
           <a:lstStyle/>
           <a:p>
             <a:pPr algn="l" indent="0" marL="0">
@@ -19086,7 +19086,7 @@
           </a:ln>
         </p:spPr>
         <p:txBody>
-          <a:bodyPr wrap="square" lIns="0" tIns="127000" rIns="101600" bIns="0" rtlCol="0" anchor="ctr"/>
+          <a:bodyPr wrap="square" lIns="88900" tIns="88900" rIns="88900" bIns="88900" rtlCol="0" anchor="ctr"/>
           <a:lstStyle/>
           <a:p>
             <a:pPr algn="l" indent="0" marL="0">
@@ -19133,7 +19133,7 @@
           </a:ln>
         </p:spPr>
         <p:txBody>
-          <a:bodyPr wrap="square" lIns="0" tIns="127000" rIns="101600" bIns="0" rtlCol="0" anchor="ctr"/>
+          <a:bodyPr wrap="square" lIns="88900" tIns="88900" rIns="88900" bIns="88900" rtlCol="0" anchor="ctr"/>
           <a:lstStyle/>
           <a:p>
             <a:pPr algn="l" indent="0" marL="0">
@@ -19180,7 +19180,7 @@
           </a:ln>
         </p:spPr>
         <p:txBody>
-          <a:bodyPr wrap="square" lIns="0" tIns="127000" rIns="101600" bIns="0" rtlCol="0" anchor="ctr"/>
+          <a:bodyPr wrap="square" lIns="88900" tIns="88900" rIns="88900" bIns="88900" rtlCol="0" anchor="ctr"/>
           <a:lstStyle/>
           <a:p>
             <a:pPr algn="l" indent="0" marL="0">
@@ -19227,7 +19227,7 @@
           </a:ln>
         </p:spPr>
         <p:txBody>
-          <a:bodyPr wrap="square" lIns="0" tIns="127000" rIns="101600" bIns="0" rtlCol="0" anchor="ctr"/>
+          <a:bodyPr wrap="square" lIns="88900" tIns="88900" rIns="88900" bIns="88900" rtlCol="0" anchor="ctr"/>
           <a:lstStyle/>
           <a:p>
             <a:pPr algn="l" indent="0" marL="0">
